--- a/Presentation/Edge_Computing_in_Industrial_Communication.pptx
+++ b/Presentation/Edge_Computing_in_Industrial_Communication.pptx
@@ -3,21 +3,25 @@
 <p:presentation xmlns:a="http://schemas.openxmlformats.org/drawingml/2006/main" xmlns:r="http://schemas.openxmlformats.org/officeDocument/2006/relationships" xmlns:p="http://schemas.openxmlformats.org/presentationml/2006/main" saveSubsetFonts="1" autoCompressPictures="0">
   <p:sldMasterIdLst>
     <p:sldMasterId id="2147483648" r:id="rId1"/>
+    <p:sldMasterId id="2147483651" r:id="rId2"/>
   </p:sldMasterIdLst>
   <p:notesMasterIdLst>
-    <p:notesMasterId r:id="rId12"/>
+    <p:notesMasterId r:id="rId16"/>
   </p:notesMasterIdLst>
   <p:sldIdLst>
-    <p:sldId id="269" r:id="rId2"/>
-    <p:sldId id="261" r:id="rId3"/>
-    <p:sldId id="270" r:id="rId4"/>
-    <p:sldId id="257" r:id="rId5"/>
-    <p:sldId id="268" r:id="rId6"/>
-    <p:sldId id="258" r:id="rId7"/>
-    <p:sldId id="259" r:id="rId8"/>
-    <p:sldId id="260" r:id="rId9"/>
-    <p:sldId id="263" r:id="rId10"/>
-    <p:sldId id="267" r:id="rId11"/>
+    <p:sldId id="269" r:id="rId3"/>
+    <p:sldId id="261" r:id="rId4"/>
+    <p:sldId id="270" r:id="rId5"/>
+    <p:sldId id="257" r:id="rId6"/>
+    <p:sldId id="268" r:id="rId7"/>
+    <p:sldId id="258" r:id="rId8"/>
+    <p:sldId id="259" r:id="rId9"/>
+    <p:sldId id="260" r:id="rId10"/>
+    <p:sldId id="263" r:id="rId11"/>
+    <p:sldId id="267" r:id="rId12"/>
+    <p:sldId id="271" r:id="rId13"/>
+    <p:sldId id="262" r:id="rId14"/>
+    <p:sldId id="266" r:id="rId15"/>
   </p:sldIdLst>
   <p:sldSz cx="12192000" cy="6858000"/>
   <p:notesSz cx="6858000" cy="12192000"/>
@@ -753,6 +757,327 @@
 </p:notes>
 </file>
 
+<file path=ppt/notesSlides/notesSlide11.xml><?xml version="1.0" encoding="utf-8"?>
+<p:notes xmlns:a="http://schemas.openxmlformats.org/drawingml/2006/main" xmlns:r="http://schemas.openxmlformats.org/officeDocument/2006/relationships" xmlns:p="http://schemas.openxmlformats.org/presentationml/2006/main">
+  <p:cSld>
+    <p:spTree>
+      <p:nvGrpSpPr>
+        <p:cNvPr id="1" name=""/>
+        <p:cNvGrpSpPr/>
+        <p:nvPr/>
+      </p:nvGrpSpPr>
+      <p:grpSpPr>
+        <a:xfrm>
+          <a:off x="0" y="0"/>
+          <a:ext cx="0" cy="0"/>
+          <a:chOff x="0" y="0"/>
+          <a:chExt cx="0" cy="0"/>
+        </a:xfrm>
+      </p:grpSpPr>
+      <p:sp>
+        <p:nvSpPr>
+          <p:cNvPr id="2" name="Slide Image Placeholder 1"/>
+          <p:cNvSpPr>
+            <a:spLocks noGrp="1" noRot="1" noChangeAspect="1"/>
+          </p:cNvSpPr>
+          <p:nvPr>
+            <p:ph type="sldImg"/>
+          </p:nvPr>
+        </p:nvSpPr>
+        <p:spPr/>
+      </p:sp>
+      <p:sp>
+        <p:nvSpPr>
+          <p:cNvPr id="3" name="Notes Placeholder 2"/>
+          <p:cNvSpPr>
+            <a:spLocks noGrp="1"/>
+          </p:cNvSpPr>
+          <p:nvPr>
+            <p:ph type="body" idx="1"/>
+          </p:nvPr>
+        </p:nvSpPr>
+        <p:spPr/>
+        <p:txBody>
+          <a:bodyPr/>
+          <a:lstStyle/>
+          <a:p>
+            <a:r>
+              <a:rPr lang="en-US" dirty="0"/>
+              <a:t>These four benefits make edge computing indispensable for industrial real-time systems.</a:t>
+            </a:r>
+          </a:p>
+        </p:txBody>
+      </p:sp>
+      <p:sp>
+        <p:nvSpPr>
+          <p:cNvPr id="4" name="Slide Number Placeholder 3"/>
+          <p:cNvSpPr>
+            <a:spLocks noGrp="1"/>
+          </p:cNvSpPr>
+          <p:nvPr>
+            <p:ph type="sldNum" sz="quarter" idx="10"/>
+          </p:nvPr>
+        </p:nvSpPr>
+        <p:spPr/>
+        <p:txBody>
+          <a:bodyPr/>
+          <a:lstStyle/>
+          <a:p>
+            <a:fld id="{F7021451-1387-4CA6-816F-3879F97B5CBC}" type="slidenum">
+              <a:rPr lang="en-US"/>
+              <a:t>11</a:t>
+            </a:fld>
+            <a:endParaRPr lang="en-US"/>
+          </a:p>
+        </p:txBody>
+      </p:sp>
+    </p:spTree>
+    <p:extLst>
+      <p:ext uri="{BB962C8B-B14F-4D97-AF65-F5344CB8AC3E}">
+        <p14:creationId xmlns:p14="http://schemas.microsoft.com/office/powerpoint/2010/main" val="1024086991"/>
+      </p:ext>
+    </p:extLst>
+  </p:cSld>
+  <p:clrMapOvr>
+    <a:masterClrMapping/>
+  </p:clrMapOvr>
+</p:notes>
+</file>
+
+<file path=ppt/notesSlides/notesSlide12.xml><?xml version="1.0" encoding="utf-8"?>
+<p:notes xmlns:a="http://schemas.openxmlformats.org/drawingml/2006/main" xmlns:r="http://schemas.openxmlformats.org/officeDocument/2006/relationships" xmlns:p="http://schemas.openxmlformats.org/presentationml/2006/main">
+  <p:cSld>
+    <p:spTree>
+      <p:nvGrpSpPr>
+        <p:cNvPr id="1" name=""/>
+        <p:cNvGrpSpPr/>
+        <p:nvPr/>
+      </p:nvGrpSpPr>
+      <p:grpSpPr>
+        <a:xfrm>
+          <a:off x="0" y="0"/>
+          <a:ext cx="0" cy="0"/>
+          <a:chOff x="0" y="0"/>
+          <a:chExt cx="0" cy="0"/>
+        </a:xfrm>
+      </p:grpSpPr>
+      <p:sp>
+        <p:nvSpPr>
+          <p:cNvPr id="2" name="Slide Image Placeholder 1"/>
+          <p:cNvSpPr>
+            <a:spLocks noGrp="1" noRot="1" noChangeAspect="1"/>
+          </p:cNvSpPr>
+          <p:nvPr>
+            <p:ph type="sldImg"/>
+          </p:nvPr>
+        </p:nvSpPr>
+        <p:spPr/>
+      </p:sp>
+      <p:sp>
+        <p:nvSpPr>
+          <p:cNvPr id="3" name="Notes Placeholder 2"/>
+          <p:cNvSpPr>
+            <a:spLocks noGrp="1"/>
+          </p:cNvSpPr>
+          <p:nvPr>
+            <p:ph type="body" idx="1"/>
+          </p:nvPr>
+        </p:nvSpPr>
+        <p:spPr/>
+        <p:txBody>
+          <a:bodyPr/>
+          <a:lstStyle/>
+          <a:p>
+            <a:r>
+              <a:rPr lang="en-US" dirty="0"/>
+              <a:t>Edge computing is now deployed across virtually every sector where timely local decisions matter.</a:t>
+            </a:r>
+          </a:p>
+        </p:txBody>
+      </p:sp>
+      <p:sp>
+        <p:nvSpPr>
+          <p:cNvPr id="4" name="Slide Number Placeholder 3"/>
+          <p:cNvSpPr>
+            <a:spLocks noGrp="1"/>
+          </p:cNvSpPr>
+          <p:nvPr>
+            <p:ph type="sldNum" sz="quarter" idx="10"/>
+          </p:nvPr>
+        </p:nvSpPr>
+        <p:spPr/>
+        <p:txBody>
+          <a:bodyPr/>
+          <a:lstStyle/>
+          <a:p>
+            <a:pPr marL="0" marR="0" lvl="0" indent="0" algn="l" defTabSz="914400" rtl="0" eaLnBrk="1" fontAlgn="auto" latinLnBrk="0" hangingPunct="1">
+              <a:lnSpc>
+                <a:spcPct val="100000"/>
+              </a:lnSpc>
+              <a:spcBef>
+                <a:spcPts val="0"/>
+              </a:spcBef>
+              <a:spcAft>
+                <a:spcPts val="0"/>
+              </a:spcAft>
+              <a:buClrTx/>
+              <a:buSzTx/>
+              <a:buFontTx/>
+              <a:buNone/>
+              <a:tabLst/>
+              <a:defRPr/>
+            </a:pPr>
+            <a:fld id="{F7021451-1387-4CA6-816F-3879F97B5CBC}" type="slidenum">
+              <a:rPr kumimoji="0" lang="en-US" sz="1800" b="0" i="0" u="none" strike="noStrike" kern="1200" cap="none" spc="0" normalizeH="0" baseline="0" noProof="0">
+                <a:ln>
+                  <a:noFill/>
+                </a:ln>
+                <a:solidFill>
+                  <a:prstClr val="black"/>
+                </a:solidFill>
+                <a:effectLst/>
+                <a:uLnTx/>
+                <a:uFillTx/>
+                <a:latin typeface="Aptos" panose="02110004020202020204"/>
+                <a:ea typeface="+mn-ea"/>
+                <a:cs typeface="+mn-cs"/>
+              </a:rPr>
+              <a:pPr marL="0" marR="0" lvl="0" indent="0" algn="l" defTabSz="914400" rtl="0" eaLnBrk="1" fontAlgn="auto" latinLnBrk="0" hangingPunct="1">
+                <a:lnSpc>
+                  <a:spcPct val="100000"/>
+                </a:lnSpc>
+                <a:spcBef>
+                  <a:spcPts val="0"/>
+                </a:spcBef>
+                <a:spcAft>
+                  <a:spcPts val="0"/>
+                </a:spcAft>
+                <a:buClrTx/>
+                <a:buSzTx/>
+                <a:buFontTx/>
+                <a:buNone/>
+                <a:tabLst/>
+                <a:defRPr/>
+              </a:pPr>
+              <a:t>12</a:t>
+            </a:fld>
+            <a:endParaRPr kumimoji="0" lang="en-US" sz="1800" b="0" i="0" u="none" strike="noStrike" kern="1200" cap="none" spc="0" normalizeH="0" baseline="0" noProof="0">
+              <a:ln>
+                <a:noFill/>
+              </a:ln>
+              <a:solidFill>
+                <a:prstClr val="black"/>
+              </a:solidFill>
+              <a:effectLst/>
+              <a:uLnTx/>
+              <a:uFillTx/>
+              <a:latin typeface="Aptos" panose="02110004020202020204"/>
+              <a:ea typeface="+mn-ea"/>
+              <a:cs typeface="+mn-cs"/>
+            </a:endParaRPr>
+          </a:p>
+        </p:txBody>
+      </p:sp>
+    </p:spTree>
+    <p:extLst>
+      <p:ext uri="{BB962C8B-B14F-4D97-AF65-F5344CB8AC3E}">
+        <p14:creationId xmlns:p14="http://schemas.microsoft.com/office/powerpoint/2010/main" val="1024086991"/>
+      </p:ext>
+    </p:extLst>
+  </p:cSld>
+  <p:clrMapOvr>
+    <a:masterClrMapping/>
+  </p:clrMapOvr>
+</p:notes>
+</file>
+
+<file path=ppt/notesSlides/notesSlide13.xml><?xml version="1.0" encoding="utf-8"?>
+<p:notes xmlns:a="http://schemas.openxmlformats.org/drawingml/2006/main" xmlns:r="http://schemas.openxmlformats.org/officeDocument/2006/relationships" xmlns:p="http://schemas.openxmlformats.org/presentationml/2006/main">
+  <p:cSld>
+    <p:spTree>
+      <p:nvGrpSpPr>
+        <p:cNvPr id="1" name=""/>
+        <p:cNvGrpSpPr/>
+        <p:nvPr/>
+      </p:nvGrpSpPr>
+      <p:grpSpPr>
+        <a:xfrm>
+          <a:off x="0" y="0"/>
+          <a:ext cx="0" cy="0"/>
+          <a:chOff x="0" y="0"/>
+          <a:chExt cx="0" cy="0"/>
+        </a:xfrm>
+      </p:grpSpPr>
+      <p:sp>
+        <p:nvSpPr>
+          <p:cNvPr id="2" name="Slide Image Placeholder 1"/>
+          <p:cNvSpPr>
+            <a:spLocks noGrp="1" noRot="1" noChangeAspect="1"/>
+          </p:cNvSpPr>
+          <p:nvPr>
+            <p:ph type="sldImg"/>
+          </p:nvPr>
+        </p:nvSpPr>
+        <p:spPr/>
+      </p:sp>
+      <p:sp>
+        <p:nvSpPr>
+          <p:cNvPr id="3" name="Notes Placeholder 2"/>
+          <p:cNvSpPr>
+            <a:spLocks noGrp="1"/>
+          </p:cNvSpPr>
+          <p:nvPr>
+            <p:ph type="body" idx="1"/>
+          </p:nvPr>
+        </p:nvSpPr>
+        <p:spPr/>
+        <p:txBody>
+          <a:bodyPr/>
+          <a:lstStyle/>
+          <a:p>
+            <a:r>
+              <a:rPr lang="en-US" dirty="0"/>
+              <a:t>These challenges are real but solvable — dedicated private networks, hardware security modules, and centralised device management platforms address most of them.</a:t>
+            </a:r>
+          </a:p>
+        </p:txBody>
+      </p:sp>
+      <p:sp>
+        <p:nvSpPr>
+          <p:cNvPr id="4" name="Slide Number Placeholder 3"/>
+          <p:cNvSpPr>
+            <a:spLocks noGrp="1"/>
+          </p:cNvSpPr>
+          <p:nvPr>
+            <p:ph type="sldNum" sz="quarter" idx="10"/>
+          </p:nvPr>
+        </p:nvSpPr>
+        <p:spPr/>
+        <p:txBody>
+          <a:bodyPr/>
+          <a:lstStyle/>
+          <a:p>
+            <a:fld id="{F7021451-1387-4CA6-816F-3879F97B5CBC}" type="slidenum">
+              <a:rPr lang="en-US"/>
+              <a:t>13</a:t>
+            </a:fld>
+            <a:endParaRPr lang="en-US"/>
+          </a:p>
+        </p:txBody>
+      </p:sp>
+    </p:spTree>
+    <p:extLst>
+      <p:ext uri="{BB962C8B-B14F-4D97-AF65-F5344CB8AC3E}">
+        <p14:creationId xmlns:p14="http://schemas.microsoft.com/office/powerpoint/2010/main" val="1024086991"/>
+      </p:ext>
+    </p:extLst>
+  </p:cSld>
+  <p:clrMapOvr>
+    <a:masterClrMapping/>
+  </p:clrMapOvr>
+</p:notes>
+</file>
+
 <file path=ppt/notesSlides/notesSlide2.xml><?xml version="1.0" encoding="utf-8"?>
 <p:notes xmlns:a="http://schemas.openxmlformats.org/drawingml/2006/main" xmlns:r="http://schemas.openxmlformats.org/officeDocument/2006/relationships" xmlns:p="http://schemas.openxmlformats.org/presentationml/2006/main">
   <p:cSld>
@@ -1548,6 +1873,13 @@
             <a:prstDash val="solid"/>
           </a:ln>
         </p:spPr>
+        <p:txBody>
+          <a:bodyPr/>
+          <a:lstStyle/>
+          <a:p>
+            <a:endParaRPr lang="en-DE"/>
+          </a:p>
+        </p:txBody>
       </p:sp>
       <p:sp>
         <p:nvSpPr>
@@ -1575,6 +1907,13 @@
             <a:prstDash val="solid"/>
           </a:ln>
         </p:spPr>
+        <p:txBody>
+          <a:bodyPr/>
+          <a:lstStyle/>
+          <a:p>
+            <a:endParaRPr lang="en-DE"/>
+          </a:p>
+        </p:txBody>
       </p:sp>
       <p:sp>
         <p:nvSpPr>
@@ -1596,7 +1935,7 @@
           </a:prstGeom>
           <a:extLst>
             <a:ext uri="{C572A759-6A51-4108-AA02-DFA0A04FC94B}">
-              <ma14:wrappingTextBoxFlag xmlns="" xmlns:ma14="http://schemas.microsoft.com/office/mac/drawingml/2011/main" val="0"/>
+              <ma14:wrappingTextBoxFlag xmlns:ma14="http://schemas.microsoft.com/office/mac/drawingml/2011/main" xmlns="" val="0"/>
             </a:ext>
           </a:extLst>
         </p:spPr>
@@ -1628,6 +1967,41 @@
     <p:extLst>
       <p:ext uri="{BB962C8B-B14F-4D97-AF65-F5344CB8AC3E}">
         <p14:creationId xmlns:p14="http://schemas.microsoft.com/office/powerpoint/2010/main" val="3985172328"/>
+      </p:ext>
+    </p:extLst>
+  </p:cSld>
+  <p:clrMapOvr>
+    <a:masterClrMapping/>
+  </p:clrMapOvr>
+</p:sldLayout>
+</file>
+
+<file path=ppt/slideLayouts/slideLayout3.xml><?xml version="1.0" encoding="utf-8"?>
+<p:sldLayout xmlns:a="http://schemas.openxmlformats.org/drawingml/2006/main" xmlns:r="http://schemas.openxmlformats.org/officeDocument/2006/relationships" xmlns:p="http://schemas.openxmlformats.org/presentationml/2006/main" preserve="1">
+  <p:cSld name="DEFAULT">
+    <p:bg>
+      <p:bgRef idx="1001">
+        <a:schemeClr val="bg1"/>
+      </p:bgRef>
+    </p:bg>
+    <p:spTree>
+      <p:nvGrpSpPr>
+        <p:cNvPr id="1" name=""/>
+        <p:cNvGrpSpPr/>
+        <p:nvPr/>
+      </p:nvGrpSpPr>
+      <p:grpSpPr>
+        <a:xfrm>
+          <a:off x="0" y="0"/>
+          <a:ext cx="0" cy="0"/>
+          <a:chOff x="0" y="0"/>
+          <a:chExt cx="0" cy="0"/>
+        </a:xfrm>
+      </p:grpSpPr>
+    </p:spTree>
+    <p:extLst>
+      <p:ext uri="{BB962C8B-B14F-4D97-AF65-F5344CB8AC3E}">
+        <p14:creationId xmlns:p14="http://schemas.microsoft.com/office/powerpoint/2010/main" val="1874791866"/>
       </p:ext>
     </p:extLst>
   </p:cSld>
@@ -1920,6 +2294,293 @@
 </p:sldMaster>
 </file>
 
+<file path=ppt/slideMasters/slideMaster2.xml><?xml version="1.0" encoding="utf-8"?>
+<p:sldMaster xmlns:a="http://schemas.openxmlformats.org/drawingml/2006/main" xmlns:r="http://schemas.openxmlformats.org/officeDocument/2006/relationships" xmlns:p="http://schemas.openxmlformats.org/presentationml/2006/main">
+  <p:cSld>
+    <p:bg>
+      <p:bgRef idx="1001">
+        <a:schemeClr val="bg1"/>
+      </p:bgRef>
+    </p:bg>
+    <p:spTree>
+      <p:nvGrpSpPr>
+        <p:cNvPr id="1" name=""/>
+        <p:cNvGrpSpPr/>
+        <p:nvPr/>
+      </p:nvGrpSpPr>
+      <p:grpSpPr>
+        <a:xfrm>
+          <a:off x="0" y="0"/>
+          <a:ext cx="0" cy="0"/>
+          <a:chOff x="0" y="0"/>
+          <a:chExt cx="0" cy="0"/>
+        </a:xfrm>
+      </p:grpSpPr>
+    </p:spTree>
+    <p:extLst>
+      <p:ext uri="{BB962C8B-B14F-4D97-AF65-F5344CB8AC3E}">
+        <p14:creationId xmlns:p14="http://schemas.microsoft.com/office/powerpoint/2010/main" val="3991298637"/>
+      </p:ext>
+    </p:extLst>
+  </p:cSld>
+  <p:clrMap bg1="lt1" tx1="dk1" bg2="lt2" tx2="dk2" accent1="accent1" accent2="accent2" accent3="accent3" accent4="accent4" accent5="accent5" accent6="accent6" hlink="hlink" folHlink="folHlink"/>
+  <p:sldLayoutIdLst>
+    <p:sldLayoutId id="2147483652" r:id="rId1"/>
+  </p:sldLayoutIdLst>
+  <p:hf sldNum="0" hdr="0" ftr="0" dt="0"/>
+  <p:txStyles>
+    <p:titleStyle>
+      <a:lvl1pPr algn="ctr" defTabSz="1219170" rtl="0" eaLnBrk="1" latinLnBrk="0" hangingPunct="1">
+        <a:spcBef>
+          <a:spcPct val="0"/>
+        </a:spcBef>
+        <a:buNone/>
+        <a:defRPr sz="5867" kern="1200">
+          <a:solidFill>
+            <a:schemeClr val="tx1"/>
+          </a:solidFill>
+          <a:latin typeface="+mj-lt"/>
+          <a:ea typeface="+mj-ea"/>
+          <a:cs typeface="+mj-cs"/>
+        </a:defRPr>
+      </a:lvl1pPr>
+    </p:titleStyle>
+    <p:bodyStyle>
+      <a:lvl1pPr marL="457189" indent="-457189" algn="l" defTabSz="1219170" rtl="0" eaLnBrk="1" latinLnBrk="0" hangingPunct="1">
+        <a:spcBef>
+          <a:spcPct val="20000"/>
+        </a:spcBef>
+        <a:buFont typeface="Arial" pitchFamily="34" charset="0"/>
+        <a:buChar char="•"/>
+        <a:defRPr sz="4267" kern="1200">
+          <a:solidFill>
+            <a:schemeClr val="tx1"/>
+          </a:solidFill>
+          <a:latin typeface="+mn-lt"/>
+          <a:ea typeface="+mn-ea"/>
+          <a:cs typeface="+mn-cs"/>
+        </a:defRPr>
+      </a:lvl1pPr>
+      <a:lvl2pPr marL="990575" indent="-380990" algn="l" defTabSz="1219170" rtl="0" eaLnBrk="1" latinLnBrk="0" hangingPunct="1">
+        <a:spcBef>
+          <a:spcPct val="20000"/>
+        </a:spcBef>
+        <a:buFont typeface="Arial" pitchFamily="34" charset="0"/>
+        <a:buChar char="–"/>
+        <a:defRPr sz="3733" kern="1200">
+          <a:solidFill>
+            <a:schemeClr val="tx1"/>
+          </a:solidFill>
+          <a:latin typeface="+mn-lt"/>
+          <a:ea typeface="+mn-ea"/>
+          <a:cs typeface="+mn-cs"/>
+        </a:defRPr>
+      </a:lvl2pPr>
+      <a:lvl3pPr marL="1523962" indent="-304792" algn="l" defTabSz="1219170" rtl="0" eaLnBrk="1" latinLnBrk="0" hangingPunct="1">
+        <a:spcBef>
+          <a:spcPct val="20000"/>
+        </a:spcBef>
+        <a:buFont typeface="Arial" pitchFamily="34" charset="0"/>
+        <a:buChar char="•"/>
+        <a:defRPr sz="3200" kern="1200">
+          <a:solidFill>
+            <a:schemeClr val="tx1"/>
+          </a:solidFill>
+          <a:latin typeface="+mn-lt"/>
+          <a:ea typeface="+mn-ea"/>
+          <a:cs typeface="+mn-cs"/>
+        </a:defRPr>
+      </a:lvl3pPr>
+      <a:lvl4pPr marL="2133547" indent="-304792" algn="l" defTabSz="1219170" rtl="0" eaLnBrk="1" latinLnBrk="0" hangingPunct="1">
+        <a:spcBef>
+          <a:spcPct val="20000"/>
+        </a:spcBef>
+        <a:buFont typeface="Arial" pitchFamily="34" charset="0"/>
+        <a:buChar char="–"/>
+        <a:defRPr sz="2667" kern="1200">
+          <a:solidFill>
+            <a:schemeClr val="tx1"/>
+          </a:solidFill>
+          <a:latin typeface="+mn-lt"/>
+          <a:ea typeface="+mn-ea"/>
+          <a:cs typeface="+mn-cs"/>
+        </a:defRPr>
+      </a:lvl4pPr>
+      <a:lvl5pPr marL="2743131" indent="-304792" algn="l" defTabSz="1219170" rtl="0" eaLnBrk="1" latinLnBrk="0" hangingPunct="1">
+        <a:spcBef>
+          <a:spcPct val="20000"/>
+        </a:spcBef>
+        <a:buFont typeface="Arial" pitchFamily="34" charset="0"/>
+        <a:buChar char="»"/>
+        <a:defRPr sz="2667" kern="1200">
+          <a:solidFill>
+            <a:schemeClr val="tx1"/>
+          </a:solidFill>
+          <a:latin typeface="+mn-lt"/>
+          <a:ea typeface="+mn-ea"/>
+          <a:cs typeface="+mn-cs"/>
+        </a:defRPr>
+      </a:lvl5pPr>
+      <a:lvl6pPr marL="3352716" indent="-304792" algn="l" defTabSz="1219170" rtl="0" eaLnBrk="1" latinLnBrk="0" hangingPunct="1">
+        <a:spcBef>
+          <a:spcPct val="20000"/>
+        </a:spcBef>
+        <a:buFont typeface="Arial" pitchFamily="34" charset="0"/>
+        <a:buChar char="•"/>
+        <a:defRPr sz="2667" kern="1200">
+          <a:solidFill>
+            <a:schemeClr val="tx1"/>
+          </a:solidFill>
+          <a:latin typeface="+mn-lt"/>
+          <a:ea typeface="+mn-ea"/>
+          <a:cs typeface="+mn-cs"/>
+        </a:defRPr>
+      </a:lvl6pPr>
+      <a:lvl7pPr marL="3962301" indent="-304792" algn="l" defTabSz="1219170" rtl="0" eaLnBrk="1" latinLnBrk="0" hangingPunct="1">
+        <a:spcBef>
+          <a:spcPct val="20000"/>
+        </a:spcBef>
+        <a:buFont typeface="Arial" pitchFamily="34" charset="0"/>
+        <a:buChar char="•"/>
+        <a:defRPr sz="2667" kern="1200">
+          <a:solidFill>
+            <a:schemeClr val="tx1"/>
+          </a:solidFill>
+          <a:latin typeface="+mn-lt"/>
+          <a:ea typeface="+mn-ea"/>
+          <a:cs typeface="+mn-cs"/>
+        </a:defRPr>
+      </a:lvl7pPr>
+      <a:lvl8pPr marL="4571886" indent="-304792" algn="l" defTabSz="1219170" rtl="0" eaLnBrk="1" latinLnBrk="0" hangingPunct="1">
+        <a:spcBef>
+          <a:spcPct val="20000"/>
+        </a:spcBef>
+        <a:buFont typeface="Arial" pitchFamily="34" charset="0"/>
+        <a:buChar char="•"/>
+        <a:defRPr sz="2667" kern="1200">
+          <a:solidFill>
+            <a:schemeClr val="tx1"/>
+          </a:solidFill>
+          <a:latin typeface="+mn-lt"/>
+          <a:ea typeface="+mn-ea"/>
+          <a:cs typeface="+mn-cs"/>
+        </a:defRPr>
+      </a:lvl8pPr>
+      <a:lvl9pPr marL="5181470" indent="-304792" algn="l" defTabSz="1219170" rtl="0" eaLnBrk="1" latinLnBrk="0" hangingPunct="1">
+        <a:spcBef>
+          <a:spcPct val="20000"/>
+        </a:spcBef>
+        <a:buFont typeface="Arial" pitchFamily="34" charset="0"/>
+        <a:buChar char="•"/>
+        <a:defRPr sz="2667" kern="1200">
+          <a:solidFill>
+            <a:schemeClr val="tx1"/>
+          </a:solidFill>
+          <a:latin typeface="+mn-lt"/>
+          <a:ea typeface="+mn-ea"/>
+          <a:cs typeface="+mn-cs"/>
+        </a:defRPr>
+      </a:lvl9pPr>
+    </p:bodyStyle>
+    <p:otherStyle>
+      <a:defPPr>
+        <a:defRPr lang="en-US"/>
+      </a:defPPr>
+      <a:lvl1pPr marL="0" algn="l" defTabSz="1219170" rtl="0" eaLnBrk="1" latinLnBrk="0" hangingPunct="1">
+        <a:defRPr sz="2400" kern="1200">
+          <a:solidFill>
+            <a:schemeClr val="tx1"/>
+          </a:solidFill>
+          <a:latin typeface="+mn-lt"/>
+          <a:ea typeface="+mn-ea"/>
+          <a:cs typeface="+mn-cs"/>
+        </a:defRPr>
+      </a:lvl1pPr>
+      <a:lvl2pPr marL="609585" algn="l" defTabSz="1219170" rtl="0" eaLnBrk="1" latinLnBrk="0" hangingPunct="1">
+        <a:defRPr sz="2400" kern="1200">
+          <a:solidFill>
+            <a:schemeClr val="tx1"/>
+          </a:solidFill>
+          <a:latin typeface="+mn-lt"/>
+          <a:ea typeface="+mn-ea"/>
+          <a:cs typeface="+mn-cs"/>
+        </a:defRPr>
+      </a:lvl2pPr>
+      <a:lvl3pPr marL="1219170" algn="l" defTabSz="1219170" rtl="0" eaLnBrk="1" latinLnBrk="0" hangingPunct="1">
+        <a:defRPr sz="2400" kern="1200">
+          <a:solidFill>
+            <a:schemeClr val="tx1"/>
+          </a:solidFill>
+          <a:latin typeface="+mn-lt"/>
+          <a:ea typeface="+mn-ea"/>
+          <a:cs typeface="+mn-cs"/>
+        </a:defRPr>
+      </a:lvl3pPr>
+      <a:lvl4pPr marL="1828754" algn="l" defTabSz="1219170" rtl="0" eaLnBrk="1" latinLnBrk="0" hangingPunct="1">
+        <a:defRPr sz="2400" kern="1200">
+          <a:solidFill>
+            <a:schemeClr val="tx1"/>
+          </a:solidFill>
+          <a:latin typeface="+mn-lt"/>
+          <a:ea typeface="+mn-ea"/>
+          <a:cs typeface="+mn-cs"/>
+        </a:defRPr>
+      </a:lvl4pPr>
+      <a:lvl5pPr marL="2438339" algn="l" defTabSz="1219170" rtl="0" eaLnBrk="1" latinLnBrk="0" hangingPunct="1">
+        <a:defRPr sz="2400" kern="1200">
+          <a:solidFill>
+            <a:schemeClr val="tx1"/>
+          </a:solidFill>
+          <a:latin typeface="+mn-lt"/>
+          <a:ea typeface="+mn-ea"/>
+          <a:cs typeface="+mn-cs"/>
+        </a:defRPr>
+      </a:lvl5pPr>
+      <a:lvl6pPr marL="3047924" algn="l" defTabSz="1219170" rtl="0" eaLnBrk="1" latinLnBrk="0" hangingPunct="1">
+        <a:defRPr sz="2400" kern="1200">
+          <a:solidFill>
+            <a:schemeClr val="tx1"/>
+          </a:solidFill>
+          <a:latin typeface="+mn-lt"/>
+          <a:ea typeface="+mn-ea"/>
+          <a:cs typeface="+mn-cs"/>
+        </a:defRPr>
+      </a:lvl6pPr>
+      <a:lvl7pPr marL="3657509" algn="l" defTabSz="1219170" rtl="0" eaLnBrk="1" latinLnBrk="0" hangingPunct="1">
+        <a:defRPr sz="2400" kern="1200">
+          <a:solidFill>
+            <a:schemeClr val="tx1"/>
+          </a:solidFill>
+          <a:latin typeface="+mn-lt"/>
+          <a:ea typeface="+mn-ea"/>
+          <a:cs typeface="+mn-cs"/>
+        </a:defRPr>
+      </a:lvl7pPr>
+      <a:lvl8pPr marL="4267093" algn="l" defTabSz="1219170" rtl="0" eaLnBrk="1" latinLnBrk="0" hangingPunct="1">
+        <a:defRPr sz="2400" kern="1200">
+          <a:solidFill>
+            <a:schemeClr val="tx1"/>
+          </a:solidFill>
+          <a:latin typeface="+mn-lt"/>
+          <a:ea typeface="+mn-ea"/>
+          <a:cs typeface="+mn-cs"/>
+        </a:defRPr>
+      </a:lvl8pPr>
+      <a:lvl9pPr marL="4876678" algn="l" defTabSz="1219170" rtl="0" eaLnBrk="1" latinLnBrk="0" hangingPunct="1">
+        <a:defRPr sz="2400" kern="1200">
+          <a:solidFill>
+            <a:schemeClr val="tx1"/>
+          </a:solidFill>
+          <a:latin typeface="+mn-lt"/>
+          <a:ea typeface="+mn-ea"/>
+          <a:cs typeface="+mn-cs"/>
+        </a:defRPr>
+      </a:lvl9pPr>
+    </p:otherStyle>
+  </p:txStyles>
+</p:sldMaster>
+</file>
+
 <file path=ppt/slides/slide1.xml><?xml version="1.0" encoding="utf-8"?>
 <p:sld xmlns:a="http://schemas.openxmlformats.org/drawingml/2006/main" xmlns:r="http://schemas.openxmlformats.org/officeDocument/2006/relationships" xmlns:p="http://schemas.openxmlformats.org/presentationml/2006/main">
   <p:cSld>
@@ -2380,7 +3041,7 @@
           </a:prstGeom>
           <a:extLst>
             <a:ext uri="{C572A759-6A51-4108-AA02-DFA0A04FC94B}">
-              <ma14:wrappingTextBoxFlag xmlns="" xmlns:ma14="http://schemas.microsoft.com/office/mac/drawingml/2011/main" val="0"/>
+              <ma14:wrappingTextBoxFlag xmlns:ma14="http://schemas.microsoft.com/office/mac/drawingml/2011/main" xmlns="" val="0"/>
             </a:ext>
           </a:extLst>
         </p:spPr>
@@ -4286,6 +4947,2428 @@
 </p:sld>
 </file>
 
+<file path=ppt/slides/slide11.xml><?xml version="1.0" encoding="utf-8"?>
+<p:sld xmlns:a="http://schemas.openxmlformats.org/drawingml/2006/main" xmlns:r="http://schemas.openxmlformats.org/officeDocument/2006/relationships" xmlns:p="http://schemas.openxmlformats.org/presentationml/2006/main">
+  <p:cSld>
+    <p:spTree>
+      <p:nvGrpSpPr>
+        <p:cNvPr id="1" name=""/>
+        <p:cNvGrpSpPr/>
+        <p:nvPr/>
+      </p:nvGrpSpPr>
+      <p:grpSpPr>
+        <a:xfrm>
+          <a:off x="0" y="0"/>
+          <a:ext cx="0" cy="0"/>
+          <a:chOff x="0" y="0"/>
+          <a:chExt cx="0" cy="0"/>
+        </a:xfrm>
+      </p:grpSpPr>
+      <p:sp>
+        <p:nvSpPr>
+          <p:cNvPr id="2" name="Text 0"/>
+          <p:cNvSpPr/>
+          <p:nvPr/>
+        </p:nvSpPr>
+        <p:spPr>
+          <a:xfrm>
+            <a:off x="609600" y="268224"/>
+            <a:ext cx="10972800" cy="792480"/>
+          </a:xfrm>
+          <a:prstGeom prst="rect">
+            <a:avLst/>
+          </a:prstGeom>
+          <a:noFill/>
+          <a:ln/>
+        </p:spPr>
+        <p:txBody>
+          <a:bodyPr wrap="square" lIns="0" tIns="0" rIns="0" bIns="0" rtlCol="0" anchor="ctr"/>
+          <a:lstStyle/>
+          <a:p>
+            <a:r>
+              <a:rPr lang="en-US" sz="4533" b="1" dirty="0">
+                <a:solidFill>
+                  <a:srgbClr val="0D2B3E"/>
+                </a:solidFill>
+                <a:latin typeface="Cambria" pitchFamily="34" charset="0"/>
+                <a:ea typeface="Cambria" pitchFamily="34" charset="-122"/>
+                <a:cs typeface="Cambria" pitchFamily="34" charset="-120"/>
+              </a:rPr>
+              <a:t>Key Benefits</a:t>
+            </a:r>
+            <a:endParaRPr lang="en-US" sz="4533" dirty="0"/>
+          </a:p>
+        </p:txBody>
+      </p:sp>
+      <p:sp>
+        <p:nvSpPr>
+          <p:cNvPr id="3" name="Shape 1"/>
+          <p:cNvSpPr/>
+          <p:nvPr/>
+        </p:nvSpPr>
+        <p:spPr>
+          <a:xfrm>
+            <a:off x="548640" y="1341120"/>
+            <a:ext cx="5547360" cy="2438400"/>
+          </a:xfrm>
+          <a:prstGeom prst="roundRect">
+            <a:avLst>
+              <a:gd name="adj" fmla="val 5000"/>
+            </a:avLst>
+          </a:prstGeom>
+          <a:solidFill>
+            <a:srgbClr val="FFFFFF"/>
+          </a:solidFill>
+          <a:ln/>
+          <a:effectLst>
+            <a:outerShdw blurRad="127000" dist="38100" dir="2700000" algn="bl" rotWithShape="0">
+              <a:srgbClr val="000000">
+                <a:alpha val="9000"/>
+              </a:srgbClr>
+            </a:outerShdw>
+          </a:effectLst>
+        </p:spPr>
+        <p:txBody>
+          <a:bodyPr/>
+          <a:lstStyle/>
+          <a:p>
+            <a:endParaRPr lang="en-DE" sz="2400"/>
+          </a:p>
+        </p:txBody>
+      </p:sp>
+      <p:sp>
+        <p:nvSpPr>
+          <p:cNvPr id="4" name="Shape 2"/>
+          <p:cNvSpPr/>
+          <p:nvPr/>
+        </p:nvSpPr>
+        <p:spPr>
+          <a:xfrm>
+            <a:off x="816864" y="1609344"/>
+            <a:ext cx="755904" cy="755904"/>
+          </a:xfrm>
+          <a:prstGeom prst="ellipse">
+            <a:avLst/>
+          </a:prstGeom>
+          <a:solidFill>
+            <a:srgbClr val="065A82"/>
+          </a:solidFill>
+          <a:ln w="12700">
+            <a:solidFill>
+              <a:srgbClr val="065A82"/>
+            </a:solidFill>
+            <a:prstDash val="solid"/>
+          </a:ln>
+        </p:spPr>
+        <p:txBody>
+          <a:bodyPr/>
+          <a:lstStyle/>
+          <a:p>
+            <a:endParaRPr lang="en-DE" sz="2400"/>
+          </a:p>
+        </p:txBody>
+      </p:sp>
+      <p:pic>
+        <p:nvPicPr>
+          <p:cNvPr id="5" name="Image 0" descr="preencoded.png"/>
+          <p:cNvPicPr>
+            <a:picLocks noChangeAspect="1"/>
+          </p:cNvPicPr>
+          <p:nvPr/>
+        </p:nvPicPr>
+        <p:blipFill>
+          <a:blip r:embed="rId3"/>
+          <a:stretch>
+            <a:fillRect/>
+          </a:stretch>
+        </p:blipFill>
+        <p:spPr>
+          <a:xfrm>
+            <a:off x="890016" y="1682496"/>
+            <a:ext cx="609600" cy="609600"/>
+          </a:xfrm>
+          <a:prstGeom prst="rect">
+            <a:avLst/>
+          </a:prstGeom>
+        </p:spPr>
+      </p:pic>
+      <p:sp>
+        <p:nvSpPr>
+          <p:cNvPr id="6" name="Text 3"/>
+          <p:cNvSpPr/>
+          <p:nvPr/>
+        </p:nvSpPr>
+        <p:spPr>
+          <a:xfrm>
+            <a:off x="1743456" y="1645920"/>
+            <a:ext cx="4145280" cy="512064"/>
+          </a:xfrm>
+          <a:prstGeom prst="rect">
+            <a:avLst/>
+          </a:prstGeom>
+          <a:noFill/>
+          <a:ln/>
+        </p:spPr>
+        <p:txBody>
+          <a:bodyPr wrap="square" lIns="0" tIns="0" rIns="0" bIns="0" rtlCol="0" anchor="ctr"/>
+          <a:lstStyle/>
+          <a:p>
+            <a:r>
+              <a:rPr lang="en-US" sz="2000" b="1" dirty="0">
+                <a:solidFill>
+                  <a:srgbClr val="0D2B3E"/>
+                </a:solidFill>
+                <a:latin typeface="Cambria" pitchFamily="34" charset="0"/>
+                <a:ea typeface="Cambria" pitchFamily="34" charset="-122"/>
+                <a:cs typeface="Cambria" pitchFamily="34" charset="-120"/>
+              </a:rPr>
+              <a:t>Low Latency</a:t>
+            </a:r>
+            <a:endParaRPr lang="en-US" sz="2000" dirty="0"/>
+          </a:p>
+        </p:txBody>
+      </p:sp>
+      <p:sp>
+        <p:nvSpPr>
+          <p:cNvPr id="7" name="Text 4"/>
+          <p:cNvSpPr/>
+          <p:nvPr/>
+        </p:nvSpPr>
+        <p:spPr>
+          <a:xfrm>
+            <a:off x="816864" y="2499360"/>
+            <a:ext cx="4998720" cy="1158240"/>
+          </a:xfrm>
+          <a:prstGeom prst="rect">
+            <a:avLst/>
+          </a:prstGeom>
+          <a:noFill/>
+          <a:ln/>
+        </p:spPr>
+        <p:txBody>
+          <a:bodyPr wrap="square" lIns="0" tIns="0" rIns="0" bIns="0" rtlCol="0" anchor="ctr"/>
+          <a:lstStyle/>
+          <a:p>
+            <a:r>
+              <a:rPr lang="en-US" sz="1467" dirty="0">
+                <a:solidFill>
+                  <a:srgbClr val="5E8FAA"/>
+                </a:solidFill>
+                <a:latin typeface="Calibri" pitchFamily="34" charset="0"/>
+                <a:ea typeface="Calibri" pitchFamily="34" charset="-122"/>
+                <a:cs typeface="Calibri" pitchFamily="34" charset="-120"/>
+              </a:rPr>
+              <a:t>Processing near the source cuts response times to milliseconds — essential for autonomous vehicles, robotics, and emergency healthcare.</a:t>
+            </a:r>
+            <a:endParaRPr lang="en-US" sz="1467" dirty="0"/>
+          </a:p>
+        </p:txBody>
+      </p:sp>
+      <p:sp>
+        <p:nvSpPr>
+          <p:cNvPr id="8" name="Shape 5"/>
+          <p:cNvSpPr/>
+          <p:nvPr/>
+        </p:nvSpPr>
+        <p:spPr>
+          <a:xfrm>
+            <a:off x="6461760" y="1341120"/>
+            <a:ext cx="5547360" cy="2438400"/>
+          </a:xfrm>
+          <a:prstGeom prst="roundRect">
+            <a:avLst>
+              <a:gd name="adj" fmla="val 5000"/>
+            </a:avLst>
+          </a:prstGeom>
+          <a:solidFill>
+            <a:srgbClr val="FFFFFF"/>
+          </a:solidFill>
+          <a:ln/>
+          <a:effectLst>
+            <a:outerShdw blurRad="127000" dist="38100" dir="2700000" algn="bl" rotWithShape="0">
+              <a:srgbClr val="000000">
+                <a:alpha val="9000"/>
+              </a:srgbClr>
+            </a:outerShdw>
+          </a:effectLst>
+        </p:spPr>
+        <p:txBody>
+          <a:bodyPr/>
+          <a:lstStyle/>
+          <a:p>
+            <a:endParaRPr lang="en-DE" sz="2400"/>
+          </a:p>
+        </p:txBody>
+      </p:sp>
+      <p:sp>
+        <p:nvSpPr>
+          <p:cNvPr id="9" name="Shape 6"/>
+          <p:cNvSpPr/>
+          <p:nvPr/>
+        </p:nvSpPr>
+        <p:spPr>
+          <a:xfrm>
+            <a:off x="6729984" y="1609344"/>
+            <a:ext cx="755904" cy="755904"/>
+          </a:xfrm>
+          <a:prstGeom prst="ellipse">
+            <a:avLst/>
+          </a:prstGeom>
+          <a:solidFill>
+            <a:srgbClr val="065A82"/>
+          </a:solidFill>
+          <a:ln w="12700">
+            <a:solidFill>
+              <a:srgbClr val="065A82"/>
+            </a:solidFill>
+            <a:prstDash val="solid"/>
+          </a:ln>
+        </p:spPr>
+        <p:txBody>
+          <a:bodyPr/>
+          <a:lstStyle/>
+          <a:p>
+            <a:endParaRPr lang="en-DE" sz="2400"/>
+          </a:p>
+        </p:txBody>
+      </p:sp>
+      <p:pic>
+        <p:nvPicPr>
+          <p:cNvPr id="10" name="Image 1" descr="preencoded.png"/>
+          <p:cNvPicPr>
+            <a:picLocks noChangeAspect="1"/>
+          </p:cNvPicPr>
+          <p:nvPr/>
+        </p:nvPicPr>
+        <p:blipFill>
+          <a:blip r:embed="rId4"/>
+          <a:stretch>
+            <a:fillRect/>
+          </a:stretch>
+        </p:blipFill>
+        <p:spPr>
+          <a:xfrm>
+            <a:off x="6803136" y="1682496"/>
+            <a:ext cx="609600" cy="609600"/>
+          </a:xfrm>
+          <a:prstGeom prst="rect">
+            <a:avLst/>
+          </a:prstGeom>
+        </p:spPr>
+      </p:pic>
+      <p:sp>
+        <p:nvSpPr>
+          <p:cNvPr id="11" name="Text 7"/>
+          <p:cNvSpPr/>
+          <p:nvPr/>
+        </p:nvSpPr>
+        <p:spPr>
+          <a:xfrm>
+            <a:off x="7656576" y="1645920"/>
+            <a:ext cx="4145280" cy="512064"/>
+          </a:xfrm>
+          <a:prstGeom prst="rect">
+            <a:avLst/>
+          </a:prstGeom>
+          <a:noFill/>
+          <a:ln/>
+        </p:spPr>
+        <p:txBody>
+          <a:bodyPr wrap="square" lIns="0" tIns="0" rIns="0" bIns="0" rtlCol="0" anchor="ctr"/>
+          <a:lstStyle/>
+          <a:p>
+            <a:r>
+              <a:rPr lang="en-US" sz="2000" b="1" dirty="0">
+                <a:solidFill>
+                  <a:srgbClr val="0D2B3E"/>
+                </a:solidFill>
+                <a:latin typeface="Cambria" pitchFamily="34" charset="0"/>
+                <a:ea typeface="Cambria" pitchFamily="34" charset="-122"/>
+                <a:cs typeface="Cambria" pitchFamily="34" charset="-120"/>
+              </a:rPr>
+              <a:t>Reduced Bandwidth</a:t>
+            </a:r>
+            <a:endParaRPr lang="en-US" sz="2000" dirty="0"/>
+          </a:p>
+        </p:txBody>
+      </p:sp>
+      <p:sp>
+        <p:nvSpPr>
+          <p:cNvPr id="12" name="Text 8"/>
+          <p:cNvSpPr/>
+          <p:nvPr/>
+        </p:nvSpPr>
+        <p:spPr>
+          <a:xfrm>
+            <a:off x="6729984" y="2499360"/>
+            <a:ext cx="4998720" cy="1158240"/>
+          </a:xfrm>
+          <a:prstGeom prst="rect">
+            <a:avLst/>
+          </a:prstGeom>
+          <a:noFill/>
+          <a:ln/>
+        </p:spPr>
+        <p:txBody>
+          <a:bodyPr wrap="square" lIns="0" tIns="0" rIns="0" bIns="0" rtlCol="0" anchor="ctr"/>
+          <a:lstStyle/>
+          <a:p>
+            <a:r>
+              <a:rPr lang="en-US" sz="1467" dirty="0">
+                <a:solidFill>
+                  <a:srgbClr val="5E8FAA"/>
+                </a:solidFill>
+                <a:latin typeface="Calibri" pitchFamily="34" charset="0"/>
+                <a:ea typeface="Calibri" pitchFamily="34" charset="-122"/>
+                <a:cs typeface="Calibri" pitchFamily="34" charset="-120"/>
+              </a:rPr>
+              <a:t>Only key results (alarms, status updates) travel to the cloud. Raw data stays local, saving network capacity.</a:t>
+            </a:r>
+            <a:endParaRPr lang="en-US" sz="1467" dirty="0"/>
+          </a:p>
+        </p:txBody>
+      </p:sp>
+      <p:sp>
+        <p:nvSpPr>
+          <p:cNvPr id="13" name="Shape 9"/>
+          <p:cNvSpPr/>
+          <p:nvPr/>
+        </p:nvSpPr>
+        <p:spPr>
+          <a:xfrm>
+            <a:off x="548640" y="4023360"/>
+            <a:ext cx="5547360" cy="2438400"/>
+          </a:xfrm>
+          <a:prstGeom prst="roundRect">
+            <a:avLst>
+              <a:gd name="adj" fmla="val 5000"/>
+            </a:avLst>
+          </a:prstGeom>
+          <a:solidFill>
+            <a:srgbClr val="FFFFFF"/>
+          </a:solidFill>
+          <a:ln/>
+          <a:effectLst>
+            <a:outerShdw blurRad="127000" dist="38100" dir="2700000" algn="bl" rotWithShape="0">
+              <a:srgbClr val="000000">
+                <a:alpha val="9000"/>
+              </a:srgbClr>
+            </a:outerShdw>
+          </a:effectLst>
+        </p:spPr>
+        <p:txBody>
+          <a:bodyPr/>
+          <a:lstStyle/>
+          <a:p>
+            <a:endParaRPr lang="en-DE" sz="2400"/>
+          </a:p>
+        </p:txBody>
+      </p:sp>
+      <p:sp>
+        <p:nvSpPr>
+          <p:cNvPr id="14" name="Shape 10"/>
+          <p:cNvSpPr/>
+          <p:nvPr/>
+        </p:nvSpPr>
+        <p:spPr>
+          <a:xfrm>
+            <a:off x="816864" y="4291584"/>
+            <a:ext cx="755904" cy="755904"/>
+          </a:xfrm>
+          <a:prstGeom prst="ellipse">
+            <a:avLst/>
+          </a:prstGeom>
+          <a:solidFill>
+            <a:srgbClr val="065A82"/>
+          </a:solidFill>
+          <a:ln w="12700">
+            <a:solidFill>
+              <a:srgbClr val="065A82"/>
+            </a:solidFill>
+            <a:prstDash val="solid"/>
+          </a:ln>
+        </p:spPr>
+        <p:txBody>
+          <a:bodyPr/>
+          <a:lstStyle/>
+          <a:p>
+            <a:endParaRPr lang="en-DE" sz="2400"/>
+          </a:p>
+        </p:txBody>
+      </p:sp>
+      <p:pic>
+        <p:nvPicPr>
+          <p:cNvPr id="15" name="Image 2" descr="preencoded.png"/>
+          <p:cNvPicPr>
+            <a:picLocks noChangeAspect="1"/>
+          </p:cNvPicPr>
+          <p:nvPr/>
+        </p:nvPicPr>
+        <p:blipFill>
+          <a:blip r:embed="rId5"/>
+          <a:stretch>
+            <a:fillRect/>
+          </a:stretch>
+        </p:blipFill>
+        <p:spPr>
+          <a:xfrm>
+            <a:off x="890016" y="4364736"/>
+            <a:ext cx="609600" cy="609600"/>
+          </a:xfrm>
+          <a:prstGeom prst="rect">
+            <a:avLst/>
+          </a:prstGeom>
+        </p:spPr>
+      </p:pic>
+      <p:sp>
+        <p:nvSpPr>
+          <p:cNvPr id="16" name="Text 11"/>
+          <p:cNvSpPr/>
+          <p:nvPr/>
+        </p:nvSpPr>
+        <p:spPr>
+          <a:xfrm>
+            <a:off x="1743456" y="4328160"/>
+            <a:ext cx="4145280" cy="512064"/>
+          </a:xfrm>
+          <a:prstGeom prst="rect">
+            <a:avLst/>
+          </a:prstGeom>
+          <a:noFill/>
+          <a:ln/>
+        </p:spPr>
+        <p:txBody>
+          <a:bodyPr wrap="square" lIns="0" tIns="0" rIns="0" bIns="0" rtlCol="0" anchor="ctr"/>
+          <a:lstStyle/>
+          <a:p>
+            <a:r>
+              <a:rPr lang="en-US" sz="2000" b="1" dirty="0">
+                <a:solidFill>
+                  <a:srgbClr val="0D2B3E"/>
+                </a:solidFill>
+                <a:latin typeface="Cambria" pitchFamily="34" charset="0"/>
+                <a:ea typeface="Cambria" pitchFamily="34" charset="-122"/>
+                <a:cs typeface="Cambria" pitchFamily="34" charset="-120"/>
+              </a:rPr>
+              <a:t>Improved Privacy</a:t>
+            </a:r>
+            <a:endParaRPr lang="en-US" sz="2000" dirty="0"/>
+          </a:p>
+        </p:txBody>
+      </p:sp>
+      <p:sp>
+        <p:nvSpPr>
+          <p:cNvPr id="17" name="Text 12"/>
+          <p:cNvSpPr/>
+          <p:nvPr/>
+        </p:nvSpPr>
+        <p:spPr>
+          <a:xfrm>
+            <a:off x="816864" y="5181600"/>
+            <a:ext cx="4998720" cy="1158240"/>
+          </a:xfrm>
+          <a:prstGeom prst="rect">
+            <a:avLst/>
+          </a:prstGeom>
+          <a:noFill/>
+          <a:ln/>
+        </p:spPr>
+        <p:txBody>
+          <a:bodyPr wrap="square" lIns="0" tIns="0" rIns="0" bIns="0" rtlCol="0" anchor="ctr"/>
+          <a:lstStyle/>
+          <a:p>
+            <a:r>
+              <a:rPr lang="en-US" sz="1467" dirty="0">
+                <a:solidFill>
+                  <a:srgbClr val="5E8FAA"/>
+                </a:solidFill>
+                <a:latin typeface="Calibri" pitchFamily="34" charset="0"/>
+                <a:ea typeface="Calibri" pitchFamily="34" charset="-122"/>
+                <a:cs typeface="Calibri" pitchFamily="34" charset="-120"/>
+              </a:rPr>
+              <a:t>Sensitive data (e.g. patient records) stays on-premise. Only necessary summaries reach the cloud.</a:t>
+            </a:r>
+            <a:endParaRPr lang="en-US" sz="1467" dirty="0"/>
+          </a:p>
+        </p:txBody>
+      </p:sp>
+      <p:sp>
+        <p:nvSpPr>
+          <p:cNvPr id="18" name="Shape 13"/>
+          <p:cNvSpPr/>
+          <p:nvPr/>
+        </p:nvSpPr>
+        <p:spPr>
+          <a:xfrm>
+            <a:off x="6461760" y="4023360"/>
+            <a:ext cx="5547360" cy="2438400"/>
+          </a:xfrm>
+          <a:prstGeom prst="roundRect">
+            <a:avLst>
+              <a:gd name="adj" fmla="val 5000"/>
+            </a:avLst>
+          </a:prstGeom>
+          <a:solidFill>
+            <a:srgbClr val="FFFFFF"/>
+          </a:solidFill>
+          <a:ln/>
+          <a:effectLst>
+            <a:outerShdw blurRad="127000" dist="38100" dir="2700000" algn="bl" rotWithShape="0">
+              <a:srgbClr val="000000">
+                <a:alpha val="9000"/>
+              </a:srgbClr>
+            </a:outerShdw>
+          </a:effectLst>
+        </p:spPr>
+        <p:txBody>
+          <a:bodyPr/>
+          <a:lstStyle/>
+          <a:p>
+            <a:endParaRPr lang="en-DE" sz="2400"/>
+          </a:p>
+        </p:txBody>
+      </p:sp>
+      <p:sp>
+        <p:nvSpPr>
+          <p:cNvPr id="19" name="Shape 14"/>
+          <p:cNvSpPr/>
+          <p:nvPr/>
+        </p:nvSpPr>
+        <p:spPr>
+          <a:xfrm>
+            <a:off x="6729984" y="4291584"/>
+            <a:ext cx="755904" cy="755904"/>
+          </a:xfrm>
+          <a:prstGeom prst="ellipse">
+            <a:avLst/>
+          </a:prstGeom>
+          <a:solidFill>
+            <a:srgbClr val="065A82"/>
+          </a:solidFill>
+          <a:ln w="12700">
+            <a:solidFill>
+              <a:srgbClr val="065A82"/>
+            </a:solidFill>
+            <a:prstDash val="solid"/>
+          </a:ln>
+        </p:spPr>
+        <p:txBody>
+          <a:bodyPr/>
+          <a:lstStyle/>
+          <a:p>
+            <a:endParaRPr lang="en-DE" sz="2400"/>
+          </a:p>
+        </p:txBody>
+      </p:sp>
+      <p:pic>
+        <p:nvPicPr>
+          <p:cNvPr id="20" name="Image 3" descr="preencoded.png"/>
+          <p:cNvPicPr>
+            <a:picLocks noChangeAspect="1"/>
+          </p:cNvPicPr>
+          <p:nvPr/>
+        </p:nvPicPr>
+        <p:blipFill>
+          <a:blip r:embed="rId6"/>
+          <a:stretch>
+            <a:fillRect/>
+          </a:stretch>
+        </p:blipFill>
+        <p:spPr>
+          <a:xfrm>
+            <a:off x="6803136" y="4364736"/>
+            <a:ext cx="609600" cy="609600"/>
+          </a:xfrm>
+          <a:prstGeom prst="rect">
+            <a:avLst/>
+          </a:prstGeom>
+        </p:spPr>
+      </p:pic>
+      <p:sp>
+        <p:nvSpPr>
+          <p:cNvPr id="21" name="Text 15"/>
+          <p:cNvSpPr/>
+          <p:nvPr/>
+        </p:nvSpPr>
+        <p:spPr>
+          <a:xfrm>
+            <a:off x="7656576" y="4328160"/>
+            <a:ext cx="4145280" cy="512064"/>
+          </a:xfrm>
+          <a:prstGeom prst="rect">
+            <a:avLst/>
+          </a:prstGeom>
+          <a:noFill/>
+          <a:ln/>
+        </p:spPr>
+        <p:txBody>
+          <a:bodyPr wrap="square" lIns="0" tIns="0" rIns="0" bIns="0" rtlCol="0" anchor="ctr"/>
+          <a:lstStyle/>
+          <a:p>
+            <a:r>
+              <a:rPr lang="en-US" sz="2000" b="1" dirty="0">
+                <a:solidFill>
+                  <a:srgbClr val="0D2B3E"/>
+                </a:solidFill>
+                <a:latin typeface="Cambria" pitchFamily="34" charset="0"/>
+                <a:ea typeface="Cambria" pitchFamily="34" charset="-122"/>
+                <a:cs typeface="Cambria" pitchFamily="34" charset="-120"/>
+              </a:rPr>
+              <a:t>Better Reliability</a:t>
+            </a:r>
+            <a:endParaRPr lang="en-US" sz="2000" dirty="0"/>
+          </a:p>
+        </p:txBody>
+      </p:sp>
+      <p:sp>
+        <p:nvSpPr>
+          <p:cNvPr id="22" name="Text 16"/>
+          <p:cNvSpPr/>
+          <p:nvPr/>
+        </p:nvSpPr>
+        <p:spPr>
+          <a:xfrm>
+            <a:off x="6729984" y="5181600"/>
+            <a:ext cx="4998720" cy="1158240"/>
+          </a:xfrm>
+          <a:prstGeom prst="rect">
+            <a:avLst/>
+          </a:prstGeom>
+          <a:noFill/>
+          <a:ln/>
+        </p:spPr>
+        <p:txBody>
+          <a:bodyPr wrap="square" lIns="0" tIns="0" rIns="0" bIns="0" rtlCol="0" anchor="ctr"/>
+          <a:lstStyle/>
+          <a:p>
+            <a:r>
+              <a:rPr lang="en-US" sz="1467" dirty="0">
+                <a:solidFill>
+                  <a:srgbClr val="5E8FAA"/>
+                </a:solidFill>
+                <a:latin typeface="Calibri" pitchFamily="34" charset="0"/>
+                <a:ea typeface="Calibri" pitchFamily="34" charset="-122"/>
+                <a:cs typeface="Calibri" pitchFamily="34" charset="-120"/>
+              </a:rPr>
+              <a:t>Edge systems continue operating when cloud connectivity is poor or lost — critical for remote factories.</a:t>
+            </a:r>
+            <a:endParaRPr lang="en-US" sz="1467" dirty="0"/>
+          </a:p>
+        </p:txBody>
+      </p:sp>
+    </p:spTree>
+  </p:cSld>
+  <p:clrMapOvr>
+    <a:masterClrMapping/>
+  </p:clrMapOvr>
+</p:sld>
+</file>
+
+<file path=ppt/slides/slide12.xml><?xml version="1.0" encoding="utf-8"?>
+<p:sld xmlns:a="http://schemas.openxmlformats.org/drawingml/2006/main" xmlns:r="http://schemas.openxmlformats.org/officeDocument/2006/relationships" xmlns:p="http://schemas.openxmlformats.org/presentationml/2006/main">
+  <p:cSld>
+    <p:bg>
+      <p:bgPr>
+        <a:solidFill>
+          <a:srgbClr val="021B2E"/>
+        </a:solidFill>
+        <a:effectLst/>
+      </p:bgPr>
+    </p:bg>
+    <p:spTree>
+      <p:nvGrpSpPr>
+        <p:cNvPr id="1" name=""/>
+        <p:cNvGrpSpPr/>
+        <p:nvPr/>
+      </p:nvGrpSpPr>
+      <p:grpSpPr>
+        <a:xfrm>
+          <a:off x="0" y="0"/>
+          <a:ext cx="0" cy="0"/>
+          <a:chOff x="0" y="0"/>
+          <a:chExt cx="0" cy="0"/>
+        </a:xfrm>
+      </p:grpSpPr>
+      <p:sp>
+        <p:nvSpPr>
+          <p:cNvPr id="2" name="Text 0"/>
+          <p:cNvSpPr/>
+          <p:nvPr/>
+        </p:nvSpPr>
+        <p:spPr>
+          <a:xfrm>
+            <a:off x="609600" y="268224"/>
+            <a:ext cx="10972800" cy="792480"/>
+          </a:xfrm>
+          <a:prstGeom prst="rect">
+            <a:avLst/>
+          </a:prstGeom>
+          <a:noFill/>
+          <a:ln/>
+        </p:spPr>
+        <p:txBody>
+          <a:bodyPr wrap="square" lIns="0" tIns="0" rIns="0" bIns="0" rtlCol="0" anchor="ctr"/>
+          <a:lstStyle/>
+          <a:p>
+            <a:pPr defTabSz="1219170"/>
+            <a:r>
+              <a:rPr lang="en-US" sz="4533" b="1" dirty="0">
+                <a:solidFill>
+                  <a:srgbClr val="FFFFFF"/>
+                </a:solidFill>
+                <a:latin typeface="Cambria" pitchFamily="34" charset="0"/>
+                <a:ea typeface="Cambria" pitchFamily="34" charset="-122"/>
+                <a:cs typeface="Cambria" pitchFamily="34" charset="-120"/>
+              </a:rPr>
+              <a:t>Application Areas</a:t>
+            </a:r>
+            <a:endParaRPr lang="en-US" sz="4533" dirty="0">
+              <a:solidFill>
+                <a:prstClr val="black"/>
+              </a:solidFill>
+              <a:latin typeface="Calibri" panose="020F0502020204030204"/>
+            </a:endParaRPr>
+          </a:p>
+        </p:txBody>
+      </p:sp>
+      <p:sp>
+        <p:nvSpPr>
+          <p:cNvPr id="3" name="Shape 1"/>
+          <p:cNvSpPr/>
+          <p:nvPr/>
+        </p:nvSpPr>
+        <p:spPr>
+          <a:xfrm>
+            <a:off x="487680" y="1341120"/>
+            <a:ext cx="2194560" cy="2194560"/>
+          </a:xfrm>
+          <a:prstGeom prst="roundRect">
+            <a:avLst>
+              <a:gd name="adj" fmla="val 6667"/>
+            </a:avLst>
+          </a:prstGeom>
+          <a:solidFill>
+            <a:srgbClr val="065A82"/>
+          </a:solidFill>
+          <a:ln w="12700">
+            <a:solidFill>
+              <a:srgbClr val="1A4F70"/>
+            </a:solidFill>
+            <a:prstDash val="solid"/>
+          </a:ln>
+        </p:spPr>
+        <p:txBody>
+          <a:bodyPr/>
+          <a:lstStyle/>
+          <a:p>
+            <a:pPr defTabSz="1219170"/>
+            <a:endParaRPr lang="en-DE" sz="2400">
+              <a:solidFill>
+                <a:prstClr val="black"/>
+              </a:solidFill>
+              <a:latin typeface="Calibri" panose="020F0502020204030204"/>
+            </a:endParaRPr>
+          </a:p>
+        </p:txBody>
+      </p:sp>
+      <p:pic>
+        <p:nvPicPr>
+          <p:cNvPr id="4" name="Image 0" descr="preencoded.png"/>
+          <p:cNvPicPr>
+            <a:picLocks noChangeAspect="1"/>
+          </p:cNvPicPr>
+          <p:nvPr/>
+        </p:nvPicPr>
+        <p:blipFill>
+          <a:blip r:embed="rId3"/>
+          <a:stretch>
+            <a:fillRect/>
+          </a:stretch>
+        </p:blipFill>
+        <p:spPr>
+          <a:xfrm>
+            <a:off x="1255776" y="1560576"/>
+            <a:ext cx="682752" cy="682752"/>
+          </a:xfrm>
+          <a:prstGeom prst="rect">
+            <a:avLst/>
+          </a:prstGeom>
+        </p:spPr>
+      </p:pic>
+      <p:sp>
+        <p:nvSpPr>
+          <p:cNvPr id="5" name="Text 2"/>
+          <p:cNvSpPr/>
+          <p:nvPr/>
+        </p:nvSpPr>
+        <p:spPr>
+          <a:xfrm>
+            <a:off x="487680" y="2340864"/>
+            <a:ext cx="2194560" cy="512064"/>
+          </a:xfrm>
+          <a:prstGeom prst="rect">
+            <a:avLst/>
+          </a:prstGeom>
+          <a:noFill/>
+          <a:ln/>
+        </p:spPr>
+        <p:txBody>
+          <a:bodyPr wrap="square" lIns="0" tIns="0" rIns="0" bIns="0" rtlCol="0" anchor="ctr"/>
+          <a:lstStyle/>
+          <a:p>
+            <a:pPr algn="ctr" defTabSz="1219170"/>
+            <a:r>
+              <a:rPr lang="en-US" sz="1333" b="1" dirty="0">
+                <a:solidFill>
+                  <a:srgbClr val="FFFFFF"/>
+                </a:solidFill>
+                <a:latin typeface="Calibri" pitchFamily="34" charset="0"/>
+                <a:ea typeface="Calibri" pitchFamily="34" charset="-122"/>
+                <a:cs typeface="Calibri" pitchFamily="34" charset="-120"/>
+              </a:rPr>
+              <a:t>Internet of Things</a:t>
+            </a:r>
+            <a:endParaRPr lang="en-US" sz="1333" dirty="0">
+              <a:solidFill>
+                <a:prstClr val="black"/>
+              </a:solidFill>
+              <a:latin typeface="Calibri" panose="020F0502020204030204"/>
+            </a:endParaRPr>
+          </a:p>
+        </p:txBody>
+      </p:sp>
+      <p:sp>
+        <p:nvSpPr>
+          <p:cNvPr id="6" name="Text 3"/>
+          <p:cNvSpPr/>
+          <p:nvPr/>
+        </p:nvSpPr>
+        <p:spPr>
+          <a:xfrm>
+            <a:off x="487680" y="2828544"/>
+            <a:ext cx="2194560" cy="633984"/>
+          </a:xfrm>
+          <a:prstGeom prst="rect">
+            <a:avLst/>
+          </a:prstGeom>
+          <a:noFill/>
+          <a:ln/>
+        </p:spPr>
+        <p:txBody>
+          <a:bodyPr wrap="square" lIns="0" tIns="0" rIns="0" bIns="0" rtlCol="0" anchor="ctr"/>
+          <a:lstStyle/>
+          <a:p>
+            <a:pPr algn="ctr" defTabSz="1219170"/>
+            <a:r>
+              <a:rPr lang="en-US" sz="1133" dirty="0">
+                <a:solidFill>
+                  <a:srgbClr val="8FC9E0"/>
+                </a:solidFill>
+                <a:latin typeface="Calibri" pitchFamily="34" charset="0"/>
+                <a:ea typeface="Calibri" pitchFamily="34" charset="-122"/>
+                <a:cs typeface="Calibri" pitchFamily="34" charset="-120"/>
+              </a:rPr>
+              <a:t>Smart homes, factories &amp; agriculture process sensor data locally for instant reactions.</a:t>
+            </a:r>
+            <a:endParaRPr lang="en-US" sz="1133" dirty="0">
+              <a:solidFill>
+                <a:prstClr val="black"/>
+              </a:solidFill>
+              <a:latin typeface="Calibri" panose="020F0502020204030204"/>
+            </a:endParaRPr>
+          </a:p>
+        </p:txBody>
+      </p:sp>
+      <p:sp>
+        <p:nvSpPr>
+          <p:cNvPr id="7" name="Shape 4"/>
+          <p:cNvSpPr/>
+          <p:nvPr/>
+        </p:nvSpPr>
+        <p:spPr>
+          <a:xfrm>
+            <a:off x="2865120" y="1341120"/>
+            <a:ext cx="2194560" cy="2194560"/>
+          </a:xfrm>
+          <a:prstGeom prst="roundRect">
+            <a:avLst>
+              <a:gd name="adj" fmla="val 6667"/>
+            </a:avLst>
+          </a:prstGeom>
+          <a:solidFill>
+            <a:srgbClr val="065A82"/>
+          </a:solidFill>
+          <a:ln w="12700">
+            <a:solidFill>
+              <a:srgbClr val="1A4F70"/>
+            </a:solidFill>
+            <a:prstDash val="solid"/>
+          </a:ln>
+        </p:spPr>
+        <p:txBody>
+          <a:bodyPr/>
+          <a:lstStyle/>
+          <a:p>
+            <a:pPr defTabSz="1219170"/>
+            <a:endParaRPr lang="en-DE" sz="2400">
+              <a:solidFill>
+                <a:prstClr val="black"/>
+              </a:solidFill>
+              <a:latin typeface="Calibri" panose="020F0502020204030204"/>
+            </a:endParaRPr>
+          </a:p>
+        </p:txBody>
+      </p:sp>
+      <p:pic>
+        <p:nvPicPr>
+          <p:cNvPr id="8" name="Image 1" descr="preencoded.png"/>
+          <p:cNvPicPr>
+            <a:picLocks noChangeAspect="1"/>
+          </p:cNvPicPr>
+          <p:nvPr/>
+        </p:nvPicPr>
+        <p:blipFill>
+          <a:blip r:embed="rId4"/>
+          <a:stretch>
+            <a:fillRect/>
+          </a:stretch>
+        </p:blipFill>
+        <p:spPr>
+          <a:xfrm>
+            <a:off x="3633216" y="1560576"/>
+            <a:ext cx="682752" cy="682752"/>
+          </a:xfrm>
+          <a:prstGeom prst="rect">
+            <a:avLst/>
+          </a:prstGeom>
+        </p:spPr>
+      </p:pic>
+      <p:sp>
+        <p:nvSpPr>
+          <p:cNvPr id="9" name="Text 5"/>
+          <p:cNvSpPr/>
+          <p:nvPr/>
+        </p:nvSpPr>
+        <p:spPr>
+          <a:xfrm>
+            <a:off x="2865120" y="2340864"/>
+            <a:ext cx="2194560" cy="512064"/>
+          </a:xfrm>
+          <a:prstGeom prst="rect">
+            <a:avLst/>
+          </a:prstGeom>
+          <a:noFill/>
+          <a:ln/>
+        </p:spPr>
+        <p:txBody>
+          <a:bodyPr wrap="square" lIns="0" tIns="0" rIns="0" bIns="0" rtlCol="0" anchor="ctr"/>
+          <a:lstStyle/>
+          <a:p>
+            <a:pPr algn="ctr" defTabSz="1219170"/>
+            <a:r>
+              <a:rPr lang="en-US" sz="1333" b="1" dirty="0">
+                <a:solidFill>
+                  <a:srgbClr val="FFFFFF"/>
+                </a:solidFill>
+                <a:latin typeface="Calibri" pitchFamily="34" charset="0"/>
+                <a:ea typeface="Calibri" pitchFamily="34" charset="-122"/>
+                <a:cs typeface="Calibri" pitchFamily="34" charset="-120"/>
+              </a:rPr>
+              <a:t>Autonomous Vehicles</a:t>
+            </a:r>
+            <a:endParaRPr lang="en-US" sz="1333" dirty="0">
+              <a:solidFill>
+                <a:prstClr val="black"/>
+              </a:solidFill>
+              <a:latin typeface="Calibri" panose="020F0502020204030204"/>
+            </a:endParaRPr>
+          </a:p>
+        </p:txBody>
+      </p:sp>
+      <p:sp>
+        <p:nvSpPr>
+          <p:cNvPr id="10" name="Text 6"/>
+          <p:cNvSpPr/>
+          <p:nvPr/>
+        </p:nvSpPr>
+        <p:spPr>
+          <a:xfrm>
+            <a:off x="2865120" y="2828544"/>
+            <a:ext cx="2194560" cy="633984"/>
+          </a:xfrm>
+          <a:prstGeom prst="rect">
+            <a:avLst/>
+          </a:prstGeom>
+          <a:noFill/>
+          <a:ln/>
+        </p:spPr>
+        <p:txBody>
+          <a:bodyPr wrap="square" lIns="0" tIns="0" rIns="0" bIns="0" rtlCol="0" anchor="ctr"/>
+          <a:lstStyle/>
+          <a:p>
+            <a:pPr algn="ctr" defTabSz="1219170"/>
+            <a:r>
+              <a:rPr lang="en-US" sz="1133" dirty="0">
+                <a:solidFill>
+                  <a:srgbClr val="8FC9E0"/>
+                </a:solidFill>
+                <a:latin typeface="Calibri" pitchFamily="34" charset="0"/>
+                <a:ea typeface="Calibri" pitchFamily="34" charset="-122"/>
+                <a:cs typeface="Calibri" pitchFamily="34" charset="-120"/>
+              </a:rPr>
+              <a:t>Cameras and LIDAR data processed on-vehicle — cloud round-trips are too slow for safety.</a:t>
+            </a:r>
+            <a:endParaRPr lang="en-US" sz="1133" dirty="0">
+              <a:solidFill>
+                <a:prstClr val="black"/>
+              </a:solidFill>
+              <a:latin typeface="Calibri" panose="020F0502020204030204"/>
+            </a:endParaRPr>
+          </a:p>
+        </p:txBody>
+      </p:sp>
+      <p:sp>
+        <p:nvSpPr>
+          <p:cNvPr id="11" name="Shape 7"/>
+          <p:cNvSpPr/>
+          <p:nvPr/>
+        </p:nvSpPr>
+        <p:spPr>
+          <a:xfrm>
+            <a:off x="5242560" y="1341120"/>
+            <a:ext cx="2194560" cy="2194560"/>
+          </a:xfrm>
+          <a:prstGeom prst="roundRect">
+            <a:avLst>
+              <a:gd name="adj" fmla="val 6667"/>
+            </a:avLst>
+          </a:prstGeom>
+          <a:solidFill>
+            <a:srgbClr val="065A82"/>
+          </a:solidFill>
+          <a:ln w="12700">
+            <a:solidFill>
+              <a:srgbClr val="1A4F70"/>
+            </a:solidFill>
+            <a:prstDash val="solid"/>
+          </a:ln>
+        </p:spPr>
+        <p:txBody>
+          <a:bodyPr/>
+          <a:lstStyle/>
+          <a:p>
+            <a:pPr defTabSz="1219170"/>
+            <a:endParaRPr lang="en-DE" sz="2400">
+              <a:solidFill>
+                <a:prstClr val="black"/>
+              </a:solidFill>
+              <a:latin typeface="Calibri" panose="020F0502020204030204"/>
+            </a:endParaRPr>
+          </a:p>
+        </p:txBody>
+      </p:sp>
+      <p:pic>
+        <p:nvPicPr>
+          <p:cNvPr id="12" name="Image 2" descr="preencoded.png"/>
+          <p:cNvPicPr>
+            <a:picLocks noChangeAspect="1"/>
+          </p:cNvPicPr>
+          <p:nvPr/>
+        </p:nvPicPr>
+        <p:blipFill>
+          <a:blip r:embed="rId5"/>
+          <a:stretch>
+            <a:fillRect/>
+          </a:stretch>
+        </p:blipFill>
+        <p:spPr>
+          <a:xfrm>
+            <a:off x="6010656" y="1560576"/>
+            <a:ext cx="682752" cy="682752"/>
+          </a:xfrm>
+          <a:prstGeom prst="rect">
+            <a:avLst/>
+          </a:prstGeom>
+        </p:spPr>
+      </p:pic>
+      <p:sp>
+        <p:nvSpPr>
+          <p:cNvPr id="13" name="Text 8"/>
+          <p:cNvSpPr/>
+          <p:nvPr/>
+        </p:nvSpPr>
+        <p:spPr>
+          <a:xfrm>
+            <a:off x="5242560" y="2340864"/>
+            <a:ext cx="2194560" cy="512064"/>
+          </a:xfrm>
+          <a:prstGeom prst="rect">
+            <a:avLst/>
+          </a:prstGeom>
+          <a:noFill/>
+          <a:ln/>
+        </p:spPr>
+        <p:txBody>
+          <a:bodyPr wrap="square" lIns="0" tIns="0" rIns="0" bIns="0" rtlCol="0" anchor="ctr"/>
+          <a:lstStyle/>
+          <a:p>
+            <a:pPr algn="ctr" defTabSz="1219170"/>
+            <a:r>
+              <a:rPr lang="en-US" sz="1333" b="1" dirty="0">
+                <a:solidFill>
+                  <a:srgbClr val="FFFFFF"/>
+                </a:solidFill>
+                <a:latin typeface="Calibri" pitchFamily="34" charset="0"/>
+                <a:ea typeface="Calibri" pitchFamily="34" charset="-122"/>
+                <a:cs typeface="Calibri" pitchFamily="34" charset="-120"/>
+              </a:rPr>
+              <a:t>Healthcare</a:t>
+            </a:r>
+            <a:endParaRPr lang="en-US" sz="1333" dirty="0">
+              <a:solidFill>
+                <a:prstClr val="black"/>
+              </a:solidFill>
+              <a:latin typeface="Calibri" panose="020F0502020204030204"/>
+            </a:endParaRPr>
+          </a:p>
+        </p:txBody>
+      </p:sp>
+      <p:sp>
+        <p:nvSpPr>
+          <p:cNvPr id="14" name="Text 9"/>
+          <p:cNvSpPr/>
+          <p:nvPr/>
+        </p:nvSpPr>
+        <p:spPr>
+          <a:xfrm>
+            <a:off x="5242560" y="2828544"/>
+            <a:ext cx="2194560" cy="633984"/>
+          </a:xfrm>
+          <a:prstGeom prst="rect">
+            <a:avLst/>
+          </a:prstGeom>
+          <a:noFill/>
+          <a:ln/>
+        </p:spPr>
+        <p:txBody>
+          <a:bodyPr wrap="square" lIns="0" tIns="0" rIns="0" bIns="0" rtlCol="0" anchor="ctr"/>
+          <a:lstStyle/>
+          <a:p>
+            <a:pPr algn="ctr" defTabSz="1219170"/>
+            <a:r>
+              <a:rPr lang="en-US" sz="1133" dirty="0">
+                <a:solidFill>
+                  <a:srgbClr val="8FC9E0"/>
+                </a:solidFill>
+                <a:latin typeface="Calibri" pitchFamily="34" charset="0"/>
+                <a:ea typeface="Calibri" pitchFamily="34" charset="-122"/>
+                <a:cs typeface="Calibri" pitchFamily="34" charset="-120"/>
+              </a:rPr>
+              <a:t>Wearables and patient monitors trigger local emergency alerts within milliseconds.</a:t>
+            </a:r>
+            <a:endParaRPr lang="en-US" sz="1133" dirty="0">
+              <a:solidFill>
+                <a:prstClr val="black"/>
+              </a:solidFill>
+              <a:latin typeface="Calibri" panose="020F0502020204030204"/>
+            </a:endParaRPr>
+          </a:p>
+        </p:txBody>
+      </p:sp>
+      <p:sp>
+        <p:nvSpPr>
+          <p:cNvPr id="15" name="Shape 10"/>
+          <p:cNvSpPr/>
+          <p:nvPr/>
+        </p:nvSpPr>
+        <p:spPr>
+          <a:xfrm>
+            <a:off x="1682496" y="3779520"/>
+            <a:ext cx="2194560" cy="2194560"/>
+          </a:xfrm>
+          <a:prstGeom prst="roundRect">
+            <a:avLst>
+              <a:gd name="adj" fmla="val 6667"/>
+            </a:avLst>
+          </a:prstGeom>
+          <a:solidFill>
+            <a:srgbClr val="065A82"/>
+          </a:solidFill>
+          <a:ln w="12700">
+            <a:solidFill>
+              <a:srgbClr val="1A4F70"/>
+            </a:solidFill>
+            <a:prstDash val="solid"/>
+          </a:ln>
+        </p:spPr>
+        <p:txBody>
+          <a:bodyPr/>
+          <a:lstStyle/>
+          <a:p>
+            <a:pPr defTabSz="1219170"/>
+            <a:endParaRPr lang="en-DE" sz="2400">
+              <a:solidFill>
+                <a:prstClr val="black"/>
+              </a:solidFill>
+              <a:latin typeface="Calibri" panose="020F0502020204030204"/>
+            </a:endParaRPr>
+          </a:p>
+        </p:txBody>
+      </p:sp>
+      <p:pic>
+        <p:nvPicPr>
+          <p:cNvPr id="16" name="Image 3" descr="preencoded.png"/>
+          <p:cNvPicPr>
+            <a:picLocks noChangeAspect="1"/>
+          </p:cNvPicPr>
+          <p:nvPr/>
+        </p:nvPicPr>
+        <p:blipFill>
+          <a:blip r:embed="rId6"/>
+          <a:stretch>
+            <a:fillRect/>
+          </a:stretch>
+        </p:blipFill>
+        <p:spPr>
+          <a:xfrm>
+            <a:off x="2450592" y="3998976"/>
+            <a:ext cx="682752" cy="682752"/>
+          </a:xfrm>
+          <a:prstGeom prst="rect">
+            <a:avLst/>
+          </a:prstGeom>
+        </p:spPr>
+      </p:pic>
+      <p:sp>
+        <p:nvSpPr>
+          <p:cNvPr id="17" name="Text 11"/>
+          <p:cNvSpPr/>
+          <p:nvPr/>
+        </p:nvSpPr>
+        <p:spPr>
+          <a:xfrm>
+            <a:off x="1682496" y="4779264"/>
+            <a:ext cx="2194560" cy="512064"/>
+          </a:xfrm>
+          <a:prstGeom prst="rect">
+            <a:avLst/>
+          </a:prstGeom>
+          <a:noFill/>
+          <a:ln/>
+        </p:spPr>
+        <p:txBody>
+          <a:bodyPr wrap="square" lIns="0" tIns="0" rIns="0" bIns="0" rtlCol="0" anchor="ctr"/>
+          <a:lstStyle/>
+          <a:p>
+            <a:pPr algn="ctr" defTabSz="1219170"/>
+            <a:r>
+              <a:rPr lang="en-US" sz="1333" b="1" dirty="0">
+                <a:solidFill>
+                  <a:srgbClr val="FFFFFF"/>
+                </a:solidFill>
+                <a:latin typeface="Calibri" pitchFamily="34" charset="0"/>
+                <a:ea typeface="Calibri" pitchFamily="34" charset="-122"/>
+                <a:cs typeface="Calibri" pitchFamily="34" charset="-120"/>
+              </a:rPr>
+              <a:t>Industrial Automation</a:t>
+            </a:r>
+            <a:endParaRPr lang="en-US" sz="1333" dirty="0">
+              <a:solidFill>
+                <a:prstClr val="black"/>
+              </a:solidFill>
+              <a:latin typeface="Calibri" panose="020F0502020204030204"/>
+            </a:endParaRPr>
+          </a:p>
+        </p:txBody>
+      </p:sp>
+      <p:sp>
+        <p:nvSpPr>
+          <p:cNvPr id="18" name="Text 12"/>
+          <p:cNvSpPr/>
+          <p:nvPr/>
+        </p:nvSpPr>
+        <p:spPr>
+          <a:xfrm>
+            <a:off x="1682496" y="5266944"/>
+            <a:ext cx="2194560" cy="633984"/>
+          </a:xfrm>
+          <a:prstGeom prst="rect">
+            <a:avLst/>
+          </a:prstGeom>
+          <a:noFill/>
+          <a:ln/>
+        </p:spPr>
+        <p:txBody>
+          <a:bodyPr wrap="square" lIns="0" tIns="0" rIns="0" bIns="0" rtlCol="0" anchor="ctr"/>
+          <a:lstStyle/>
+          <a:p>
+            <a:pPr algn="ctr" defTabSz="1219170"/>
+            <a:r>
+              <a:rPr lang="en-US" sz="1133" dirty="0">
+                <a:solidFill>
+                  <a:srgbClr val="8FC9E0"/>
+                </a:solidFill>
+                <a:latin typeface="Calibri" pitchFamily="34" charset="0"/>
+                <a:ea typeface="Calibri" pitchFamily="34" charset="-122"/>
+                <a:cs typeface="Calibri" pitchFamily="34" charset="-120"/>
+              </a:rPr>
+              <a:t>Fault detection, quality control, and real-time machine monitoring on the factory floor.</a:t>
+            </a:r>
+            <a:endParaRPr lang="en-US" sz="1133" dirty="0">
+              <a:solidFill>
+                <a:prstClr val="black"/>
+              </a:solidFill>
+              <a:latin typeface="Calibri" panose="020F0502020204030204"/>
+            </a:endParaRPr>
+          </a:p>
+        </p:txBody>
+      </p:sp>
+      <p:sp>
+        <p:nvSpPr>
+          <p:cNvPr id="19" name="Shape 13"/>
+          <p:cNvSpPr/>
+          <p:nvPr/>
+        </p:nvSpPr>
+        <p:spPr>
+          <a:xfrm>
+            <a:off x="4059936" y="3779520"/>
+            <a:ext cx="2194560" cy="2194560"/>
+          </a:xfrm>
+          <a:prstGeom prst="roundRect">
+            <a:avLst>
+              <a:gd name="adj" fmla="val 6667"/>
+            </a:avLst>
+          </a:prstGeom>
+          <a:solidFill>
+            <a:srgbClr val="065A82"/>
+          </a:solidFill>
+          <a:ln w="12700">
+            <a:solidFill>
+              <a:srgbClr val="1A4F70"/>
+            </a:solidFill>
+            <a:prstDash val="solid"/>
+          </a:ln>
+        </p:spPr>
+        <p:txBody>
+          <a:bodyPr/>
+          <a:lstStyle/>
+          <a:p>
+            <a:pPr defTabSz="1219170"/>
+            <a:endParaRPr lang="en-DE" sz="2400">
+              <a:solidFill>
+                <a:prstClr val="black"/>
+              </a:solidFill>
+              <a:latin typeface="Calibri" panose="020F0502020204030204"/>
+            </a:endParaRPr>
+          </a:p>
+        </p:txBody>
+      </p:sp>
+      <p:pic>
+        <p:nvPicPr>
+          <p:cNvPr id="20" name="Image 4" descr="preencoded.png"/>
+          <p:cNvPicPr>
+            <a:picLocks noChangeAspect="1"/>
+          </p:cNvPicPr>
+          <p:nvPr/>
+        </p:nvPicPr>
+        <p:blipFill>
+          <a:blip r:embed="rId7"/>
+          <a:stretch>
+            <a:fillRect/>
+          </a:stretch>
+        </p:blipFill>
+        <p:spPr>
+          <a:xfrm>
+            <a:off x="4828032" y="3998976"/>
+            <a:ext cx="682752" cy="682752"/>
+          </a:xfrm>
+          <a:prstGeom prst="rect">
+            <a:avLst/>
+          </a:prstGeom>
+        </p:spPr>
+      </p:pic>
+      <p:sp>
+        <p:nvSpPr>
+          <p:cNvPr id="21" name="Text 14"/>
+          <p:cNvSpPr/>
+          <p:nvPr/>
+        </p:nvSpPr>
+        <p:spPr>
+          <a:xfrm>
+            <a:off x="4059936" y="4779264"/>
+            <a:ext cx="2194560" cy="512064"/>
+          </a:xfrm>
+          <a:prstGeom prst="rect">
+            <a:avLst/>
+          </a:prstGeom>
+          <a:noFill/>
+          <a:ln/>
+        </p:spPr>
+        <p:txBody>
+          <a:bodyPr wrap="square" lIns="0" tIns="0" rIns="0" bIns="0" rtlCol="0" anchor="ctr"/>
+          <a:lstStyle/>
+          <a:p>
+            <a:pPr algn="ctr" defTabSz="1219170"/>
+            <a:r>
+              <a:rPr lang="en-US" sz="1333" b="1" dirty="0">
+                <a:solidFill>
+                  <a:srgbClr val="FFFFFF"/>
+                </a:solidFill>
+                <a:latin typeface="Calibri" pitchFamily="34" charset="0"/>
+                <a:ea typeface="Calibri" pitchFamily="34" charset="-122"/>
+                <a:cs typeface="Calibri" pitchFamily="34" charset="-120"/>
+              </a:rPr>
+              <a:t>Smart Cities</a:t>
+            </a:r>
+            <a:endParaRPr lang="en-US" sz="1333" dirty="0">
+              <a:solidFill>
+                <a:prstClr val="black"/>
+              </a:solidFill>
+              <a:latin typeface="Calibri" panose="020F0502020204030204"/>
+            </a:endParaRPr>
+          </a:p>
+        </p:txBody>
+      </p:sp>
+      <p:sp>
+        <p:nvSpPr>
+          <p:cNvPr id="22" name="Text 15"/>
+          <p:cNvSpPr/>
+          <p:nvPr/>
+        </p:nvSpPr>
+        <p:spPr>
+          <a:xfrm>
+            <a:off x="4059936" y="5266944"/>
+            <a:ext cx="2194560" cy="633984"/>
+          </a:xfrm>
+          <a:prstGeom prst="rect">
+            <a:avLst/>
+          </a:prstGeom>
+          <a:noFill/>
+          <a:ln/>
+        </p:spPr>
+        <p:txBody>
+          <a:bodyPr wrap="square" lIns="0" tIns="0" rIns="0" bIns="0" rtlCol="0" anchor="ctr"/>
+          <a:lstStyle/>
+          <a:p>
+            <a:pPr algn="ctr" defTabSz="1219170"/>
+            <a:r>
+              <a:rPr lang="en-US" sz="1133" dirty="0">
+                <a:solidFill>
+                  <a:srgbClr val="8FC9E0"/>
+                </a:solidFill>
+                <a:latin typeface="Calibri" pitchFamily="34" charset="0"/>
+                <a:ea typeface="Calibri" pitchFamily="34" charset="-122"/>
+                <a:cs typeface="Calibri" pitchFamily="34" charset="-120"/>
+              </a:rPr>
+              <a:t>Traffic sensors and cameras analysed locally to reduce congestion and improve safety.</a:t>
+            </a:r>
+            <a:endParaRPr lang="en-US" sz="1133" dirty="0">
+              <a:solidFill>
+                <a:prstClr val="black"/>
+              </a:solidFill>
+              <a:latin typeface="Calibri" panose="020F0502020204030204"/>
+            </a:endParaRPr>
+          </a:p>
+        </p:txBody>
+      </p:sp>
+      <p:sp>
+        <p:nvSpPr>
+          <p:cNvPr id="23" name="Shape 16"/>
+          <p:cNvSpPr/>
+          <p:nvPr/>
+        </p:nvSpPr>
+        <p:spPr>
+          <a:xfrm>
+            <a:off x="8461248" y="1280160"/>
+            <a:ext cx="3243072" cy="4876800"/>
+          </a:xfrm>
+          <a:prstGeom prst="roundRect">
+            <a:avLst>
+              <a:gd name="adj" fmla="val 3000"/>
+            </a:avLst>
+          </a:prstGeom>
+          <a:solidFill>
+            <a:srgbClr val="031E30"/>
+          </a:solidFill>
+          <a:ln w="12700">
+            <a:solidFill>
+              <a:srgbClr val="1A4F70"/>
+            </a:solidFill>
+            <a:prstDash val="solid"/>
+          </a:ln>
+        </p:spPr>
+        <p:txBody>
+          <a:bodyPr/>
+          <a:lstStyle/>
+          <a:p>
+            <a:pPr defTabSz="1219170"/>
+            <a:endParaRPr lang="en-DE" sz="2400">
+              <a:solidFill>
+                <a:prstClr val="black"/>
+              </a:solidFill>
+              <a:latin typeface="Calibri" panose="020F0502020204030204"/>
+            </a:endParaRPr>
+          </a:p>
+        </p:txBody>
+      </p:sp>
+      <p:sp>
+        <p:nvSpPr>
+          <p:cNvPr id="24" name="Text 17"/>
+          <p:cNvSpPr/>
+          <p:nvPr/>
+        </p:nvSpPr>
+        <p:spPr>
+          <a:xfrm>
+            <a:off x="6949440" y="1463040"/>
+            <a:ext cx="4632960" cy="548640"/>
+          </a:xfrm>
+          <a:prstGeom prst="rect">
+            <a:avLst/>
+          </a:prstGeom>
+          <a:noFill/>
+          <a:ln/>
+        </p:spPr>
+        <p:txBody>
+          <a:bodyPr wrap="square" lIns="0" tIns="0" rIns="0" bIns="0" rtlCol="0" anchor="ctr"/>
+          <a:lstStyle/>
+          <a:p>
+            <a:pPr algn="ctr" defTabSz="1219170"/>
+            <a:r>
+              <a:rPr lang="en-US" sz="1867" b="1" dirty="0">
+                <a:solidFill>
+                  <a:srgbClr val="02C39A"/>
+                </a:solidFill>
+                <a:latin typeface="Cambria" pitchFamily="34" charset="0"/>
+                <a:ea typeface="Cambria" pitchFamily="34" charset="-122"/>
+                <a:cs typeface="Cambria" pitchFamily="34" charset="-120"/>
+              </a:rPr>
+              <a:t>Key Insight</a:t>
+            </a:r>
+            <a:endParaRPr lang="en-US" sz="1867" dirty="0">
+              <a:solidFill>
+                <a:prstClr val="black"/>
+              </a:solidFill>
+              <a:latin typeface="Calibri" panose="020F0502020204030204"/>
+            </a:endParaRPr>
+          </a:p>
+        </p:txBody>
+      </p:sp>
+      <p:sp>
+        <p:nvSpPr>
+          <p:cNvPr id="25" name="Text 18"/>
+          <p:cNvSpPr/>
+          <p:nvPr/>
+        </p:nvSpPr>
+        <p:spPr>
+          <a:xfrm>
+            <a:off x="8652387" y="2133600"/>
+            <a:ext cx="2869053" cy="3535680"/>
+          </a:xfrm>
+          <a:prstGeom prst="rect">
+            <a:avLst/>
+          </a:prstGeom>
+          <a:noFill/>
+          <a:ln/>
+        </p:spPr>
+        <p:txBody>
+          <a:bodyPr wrap="square" lIns="0" tIns="0" rIns="0" bIns="0" rtlCol="0" anchor="ctr"/>
+          <a:lstStyle/>
+          <a:p>
+            <a:pPr defTabSz="1219170"/>
+            <a:r>
+              <a:rPr lang="en-US" sz="1533" dirty="0">
+                <a:solidFill>
+                  <a:srgbClr val="8FC9E0"/>
+                </a:solidFill>
+                <a:latin typeface="Calibri" pitchFamily="34" charset="0"/>
+                <a:ea typeface="Calibri" pitchFamily="34" charset="-122"/>
+                <a:cs typeface="Calibri" pitchFamily="34" charset="-120"/>
+              </a:rPr>
+              <a:t>In every domain, the unifying theme is the same: decisions that matter happen in real time, and real time means milliseconds — not the 500 ms+ of a cloud round-trip.</a:t>
+            </a:r>
+            <a:endParaRPr lang="en-US" sz="1533" dirty="0">
+              <a:solidFill>
+                <a:prstClr val="black"/>
+              </a:solidFill>
+              <a:latin typeface="Calibri" panose="020F0502020204030204"/>
+            </a:endParaRPr>
+          </a:p>
+          <a:p>
+            <a:pPr defTabSz="1219170"/>
+            <a:endParaRPr lang="en-US" sz="1533" dirty="0">
+              <a:solidFill>
+                <a:prstClr val="black"/>
+              </a:solidFill>
+              <a:latin typeface="Calibri" panose="020F0502020204030204"/>
+            </a:endParaRPr>
+          </a:p>
+          <a:p>
+            <a:pPr defTabSz="1219170"/>
+            <a:r>
+              <a:rPr lang="en-US" sz="1533" dirty="0">
+                <a:solidFill>
+                  <a:srgbClr val="8FC9E0"/>
+                </a:solidFill>
+                <a:latin typeface="Calibri" pitchFamily="34" charset="0"/>
+                <a:ea typeface="Calibri" pitchFamily="34" charset="-122"/>
+                <a:cs typeface="Calibri" pitchFamily="34" charset="-120"/>
+              </a:rPr>
+              <a:t>Edge computing bridges the gap between raw sensor data and timely, local intelligence.</a:t>
+            </a:r>
+            <a:endParaRPr lang="en-US" sz="1533" dirty="0">
+              <a:solidFill>
+                <a:prstClr val="black"/>
+              </a:solidFill>
+              <a:latin typeface="Calibri" panose="020F0502020204030204"/>
+            </a:endParaRPr>
+          </a:p>
+        </p:txBody>
+      </p:sp>
+    </p:spTree>
+  </p:cSld>
+  <p:clrMapOvr>
+    <a:masterClrMapping/>
+  </p:clrMapOvr>
+</p:sld>
+</file>
+
+<file path=ppt/slides/slide13.xml><?xml version="1.0" encoding="utf-8"?>
+<p:sld xmlns:a="http://schemas.openxmlformats.org/drawingml/2006/main" xmlns:r="http://schemas.openxmlformats.org/officeDocument/2006/relationships" xmlns:p="http://schemas.openxmlformats.org/presentationml/2006/main">
+  <p:cSld>
+    <p:spTree>
+      <p:nvGrpSpPr>
+        <p:cNvPr id="1" name=""/>
+        <p:cNvGrpSpPr/>
+        <p:nvPr/>
+      </p:nvGrpSpPr>
+      <p:grpSpPr>
+        <a:xfrm>
+          <a:off x="0" y="0"/>
+          <a:ext cx="0" cy="0"/>
+          <a:chOff x="0" y="0"/>
+          <a:chExt cx="0" cy="0"/>
+        </a:xfrm>
+      </p:grpSpPr>
+      <p:sp>
+        <p:nvSpPr>
+          <p:cNvPr id="2" name="Text 0"/>
+          <p:cNvSpPr/>
+          <p:nvPr/>
+        </p:nvSpPr>
+        <p:spPr>
+          <a:xfrm>
+            <a:off x="609600" y="268224"/>
+            <a:ext cx="10972800" cy="792480"/>
+          </a:xfrm>
+          <a:prstGeom prst="rect">
+            <a:avLst/>
+          </a:prstGeom>
+          <a:noFill/>
+          <a:ln/>
+        </p:spPr>
+        <p:txBody>
+          <a:bodyPr wrap="square" lIns="0" tIns="0" rIns="0" bIns="0" rtlCol="0" anchor="ctr"/>
+          <a:lstStyle/>
+          <a:p>
+            <a:r>
+              <a:rPr lang="en-US" sz="4533" b="1" dirty="0">
+                <a:solidFill>
+                  <a:srgbClr val="0D2B3E"/>
+                </a:solidFill>
+                <a:latin typeface="Cambria" pitchFamily="34" charset="0"/>
+                <a:ea typeface="Cambria" pitchFamily="34" charset="-122"/>
+                <a:cs typeface="Cambria" pitchFamily="34" charset="-120"/>
+              </a:rPr>
+              <a:t>Challenges &amp; Limitations</a:t>
+            </a:r>
+            <a:endParaRPr lang="en-US" sz="4533" dirty="0"/>
+          </a:p>
+        </p:txBody>
+      </p:sp>
+      <p:sp>
+        <p:nvSpPr>
+          <p:cNvPr id="3" name="Shape 1"/>
+          <p:cNvSpPr/>
+          <p:nvPr/>
+        </p:nvSpPr>
+        <p:spPr>
+          <a:xfrm>
+            <a:off x="487680" y="1341120"/>
+            <a:ext cx="5486400" cy="2438400"/>
+          </a:xfrm>
+          <a:prstGeom prst="roundRect">
+            <a:avLst>
+              <a:gd name="adj" fmla="val 5000"/>
+            </a:avLst>
+          </a:prstGeom>
+          <a:solidFill>
+            <a:srgbClr val="FEF8F8"/>
+          </a:solidFill>
+          <a:ln w="12700">
+            <a:solidFill>
+              <a:srgbClr val="FDDEDE"/>
+            </a:solidFill>
+            <a:prstDash val="solid"/>
+          </a:ln>
+          <a:effectLst>
+            <a:outerShdw blurRad="101600" dist="25400" dir="2700000" algn="bl" rotWithShape="0">
+              <a:srgbClr val="000000">
+                <a:alpha val="8000"/>
+              </a:srgbClr>
+            </a:outerShdw>
+          </a:effectLst>
+        </p:spPr>
+        <p:txBody>
+          <a:bodyPr/>
+          <a:lstStyle/>
+          <a:p>
+            <a:endParaRPr lang="en-DE" sz="2400"/>
+          </a:p>
+        </p:txBody>
+      </p:sp>
+      <p:sp>
+        <p:nvSpPr>
+          <p:cNvPr id="4" name="Shape 2"/>
+          <p:cNvSpPr/>
+          <p:nvPr/>
+        </p:nvSpPr>
+        <p:spPr>
+          <a:xfrm>
+            <a:off x="755904" y="1609344"/>
+            <a:ext cx="755904" cy="755904"/>
+          </a:xfrm>
+          <a:prstGeom prst="ellipse">
+            <a:avLst/>
+          </a:prstGeom>
+          <a:solidFill>
+            <a:srgbClr val="D94F4F"/>
+          </a:solidFill>
+          <a:ln w="12700">
+            <a:solidFill>
+              <a:srgbClr val="D94F4F"/>
+            </a:solidFill>
+            <a:prstDash val="solid"/>
+          </a:ln>
+        </p:spPr>
+        <p:txBody>
+          <a:bodyPr/>
+          <a:lstStyle/>
+          <a:p>
+            <a:endParaRPr lang="en-DE" sz="2400"/>
+          </a:p>
+        </p:txBody>
+      </p:sp>
+      <p:pic>
+        <p:nvPicPr>
+          <p:cNvPr id="5" name="Image 0" descr="preencoded.png"/>
+          <p:cNvPicPr>
+            <a:picLocks noChangeAspect="1"/>
+          </p:cNvPicPr>
+          <p:nvPr/>
+        </p:nvPicPr>
+        <p:blipFill>
+          <a:blip r:embed="rId3"/>
+          <a:stretch>
+            <a:fillRect/>
+          </a:stretch>
+        </p:blipFill>
+        <p:spPr>
+          <a:xfrm>
+            <a:off x="829056" y="1682496"/>
+            <a:ext cx="609600" cy="609600"/>
+          </a:xfrm>
+          <a:prstGeom prst="rect">
+            <a:avLst/>
+          </a:prstGeom>
+        </p:spPr>
+      </p:pic>
+      <p:sp>
+        <p:nvSpPr>
+          <p:cNvPr id="6" name="Text 3"/>
+          <p:cNvSpPr/>
+          <p:nvPr/>
+        </p:nvSpPr>
+        <p:spPr>
+          <a:xfrm>
+            <a:off x="1682496" y="1645920"/>
+            <a:ext cx="4084320" cy="512064"/>
+          </a:xfrm>
+          <a:prstGeom prst="rect">
+            <a:avLst/>
+          </a:prstGeom>
+          <a:noFill/>
+          <a:ln/>
+        </p:spPr>
+        <p:txBody>
+          <a:bodyPr wrap="square" lIns="0" tIns="0" rIns="0" bIns="0" rtlCol="0" anchor="ctr"/>
+          <a:lstStyle/>
+          <a:p>
+            <a:r>
+              <a:rPr lang="en-US" sz="1867" b="1" dirty="0">
+                <a:solidFill>
+                  <a:srgbClr val="0D2B3E"/>
+                </a:solidFill>
+                <a:latin typeface="Cambria" pitchFamily="34" charset="0"/>
+                <a:ea typeface="Cambria" pitchFamily="34" charset="-122"/>
+                <a:cs typeface="Cambria" pitchFamily="34" charset="-120"/>
+              </a:rPr>
+              <a:t>Security Risks</a:t>
+            </a:r>
+            <a:endParaRPr lang="en-US" sz="1867" dirty="0"/>
+          </a:p>
+        </p:txBody>
+      </p:sp>
+      <p:sp>
+        <p:nvSpPr>
+          <p:cNvPr id="7" name="Text 4"/>
+          <p:cNvSpPr/>
+          <p:nvPr/>
+        </p:nvSpPr>
+        <p:spPr>
+          <a:xfrm>
+            <a:off x="755904" y="2499360"/>
+            <a:ext cx="4998720" cy="1158240"/>
+          </a:xfrm>
+          <a:prstGeom prst="rect">
+            <a:avLst/>
+          </a:prstGeom>
+          <a:noFill/>
+          <a:ln/>
+        </p:spPr>
+        <p:txBody>
+          <a:bodyPr wrap="square" lIns="0" tIns="0" rIns="0" bIns="0" rtlCol="0" anchor="ctr"/>
+          <a:lstStyle/>
+          <a:p>
+            <a:r>
+              <a:rPr lang="en-US" sz="1467" dirty="0">
+                <a:solidFill>
+                  <a:srgbClr val="5E8FAA"/>
+                </a:solidFill>
+                <a:latin typeface="Calibri" pitchFamily="34" charset="0"/>
+                <a:ea typeface="Calibri" pitchFamily="34" charset="-122"/>
+                <a:cs typeface="Calibri" pitchFamily="34" charset="-120"/>
+              </a:rPr>
+              <a:t>Edge devices are distributed across many sites, making centralised protection difficult. A compromised device can impact the whole system.</a:t>
+            </a:r>
+            <a:endParaRPr lang="en-US" sz="1467" dirty="0"/>
+          </a:p>
+        </p:txBody>
+      </p:sp>
+      <p:sp>
+        <p:nvSpPr>
+          <p:cNvPr id="8" name="Shape 5"/>
+          <p:cNvSpPr/>
+          <p:nvPr/>
+        </p:nvSpPr>
+        <p:spPr>
+          <a:xfrm>
+            <a:off x="6400800" y="1341120"/>
+            <a:ext cx="5486400" cy="2438400"/>
+          </a:xfrm>
+          <a:prstGeom prst="roundRect">
+            <a:avLst>
+              <a:gd name="adj" fmla="val 5000"/>
+            </a:avLst>
+          </a:prstGeom>
+          <a:solidFill>
+            <a:srgbClr val="FEF8F8"/>
+          </a:solidFill>
+          <a:ln w="12700">
+            <a:solidFill>
+              <a:srgbClr val="FDDEDE"/>
+            </a:solidFill>
+            <a:prstDash val="solid"/>
+          </a:ln>
+          <a:effectLst>
+            <a:outerShdw blurRad="101600" dist="25400" dir="2700000" algn="bl" rotWithShape="0">
+              <a:srgbClr val="000000">
+                <a:alpha val="8000"/>
+              </a:srgbClr>
+            </a:outerShdw>
+          </a:effectLst>
+        </p:spPr>
+        <p:txBody>
+          <a:bodyPr/>
+          <a:lstStyle/>
+          <a:p>
+            <a:endParaRPr lang="en-DE" sz="2400"/>
+          </a:p>
+        </p:txBody>
+      </p:sp>
+      <p:sp>
+        <p:nvSpPr>
+          <p:cNvPr id="9" name="Shape 6"/>
+          <p:cNvSpPr/>
+          <p:nvPr/>
+        </p:nvSpPr>
+        <p:spPr>
+          <a:xfrm>
+            <a:off x="6669024" y="1609344"/>
+            <a:ext cx="755904" cy="755904"/>
+          </a:xfrm>
+          <a:prstGeom prst="ellipse">
+            <a:avLst/>
+          </a:prstGeom>
+          <a:solidFill>
+            <a:srgbClr val="D94F4F"/>
+          </a:solidFill>
+          <a:ln w="12700">
+            <a:solidFill>
+              <a:srgbClr val="D94F4F"/>
+            </a:solidFill>
+            <a:prstDash val="solid"/>
+          </a:ln>
+        </p:spPr>
+        <p:txBody>
+          <a:bodyPr/>
+          <a:lstStyle/>
+          <a:p>
+            <a:endParaRPr lang="en-DE" sz="2400"/>
+          </a:p>
+        </p:txBody>
+      </p:sp>
+      <p:pic>
+        <p:nvPicPr>
+          <p:cNvPr id="10" name="Image 1" descr="preencoded.png"/>
+          <p:cNvPicPr>
+            <a:picLocks noChangeAspect="1"/>
+          </p:cNvPicPr>
+          <p:nvPr/>
+        </p:nvPicPr>
+        <p:blipFill>
+          <a:blip r:embed="rId4"/>
+          <a:stretch>
+            <a:fillRect/>
+          </a:stretch>
+        </p:blipFill>
+        <p:spPr>
+          <a:xfrm>
+            <a:off x="6742176" y="1682496"/>
+            <a:ext cx="609600" cy="609600"/>
+          </a:xfrm>
+          <a:prstGeom prst="rect">
+            <a:avLst/>
+          </a:prstGeom>
+        </p:spPr>
+      </p:pic>
+      <p:sp>
+        <p:nvSpPr>
+          <p:cNvPr id="11" name="Text 7"/>
+          <p:cNvSpPr/>
+          <p:nvPr/>
+        </p:nvSpPr>
+        <p:spPr>
+          <a:xfrm>
+            <a:off x="7595616" y="1645920"/>
+            <a:ext cx="4084320" cy="512064"/>
+          </a:xfrm>
+          <a:prstGeom prst="rect">
+            <a:avLst/>
+          </a:prstGeom>
+          <a:noFill/>
+          <a:ln/>
+        </p:spPr>
+        <p:txBody>
+          <a:bodyPr wrap="square" lIns="0" tIns="0" rIns="0" bIns="0" rtlCol="0" anchor="ctr"/>
+          <a:lstStyle/>
+          <a:p>
+            <a:r>
+              <a:rPr lang="en-US" sz="1867" b="1" dirty="0">
+                <a:solidFill>
+                  <a:srgbClr val="0D2B3E"/>
+                </a:solidFill>
+                <a:latin typeface="Cambria" pitchFamily="34" charset="0"/>
+                <a:ea typeface="Cambria" pitchFamily="34" charset="-122"/>
+                <a:cs typeface="Cambria" pitchFamily="34" charset="-120"/>
+              </a:rPr>
+              <a:t>Limited Resources</a:t>
+            </a:r>
+            <a:endParaRPr lang="en-US" sz="1867" dirty="0"/>
+          </a:p>
+        </p:txBody>
+      </p:sp>
+      <p:sp>
+        <p:nvSpPr>
+          <p:cNvPr id="12" name="Text 8"/>
+          <p:cNvSpPr/>
+          <p:nvPr/>
+        </p:nvSpPr>
+        <p:spPr>
+          <a:xfrm>
+            <a:off x="6669024" y="2499360"/>
+            <a:ext cx="4998720" cy="1158240"/>
+          </a:xfrm>
+          <a:prstGeom prst="rect">
+            <a:avLst/>
+          </a:prstGeom>
+          <a:noFill/>
+          <a:ln/>
+        </p:spPr>
+        <p:txBody>
+          <a:bodyPr wrap="square" lIns="0" tIns="0" rIns="0" bIns="0" rtlCol="0" anchor="ctr"/>
+          <a:lstStyle/>
+          <a:p>
+            <a:r>
+              <a:rPr lang="en-US" sz="1467" dirty="0">
+                <a:solidFill>
+                  <a:srgbClr val="5E8FAA"/>
+                </a:solidFill>
+                <a:latin typeface="Calibri" pitchFamily="34" charset="0"/>
+                <a:ea typeface="Calibri" pitchFamily="34" charset="-122"/>
+                <a:cs typeface="Calibri" pitchFamily="34" charset="-120"/>
+              </a:rPr>
+              <a:t>Edge hardware has less compute, memory, and storage than cloud servers. Applications must be carefully optimised.</a:t>
+            </a:r>
+            <a:endParaRPr lang="en-US" sz="1467" dirty="0"/>
+          </a:p>
+        </p:txBody>
+      </p:sp>
+      <p:sp>
+        <p:nvSpPr>
+          <p:cNvPr id="13" name="Shape 9"/>
+          <p:cNvSpPr/>
+          <p:nvPr/>
+        </p:nvSpPr>
+        <p:spPr>
+          <a:xfrm>
+            <a:off x="487680" y="4023360"/>
+            <a:ext cx="5486400" cy="2438400"/>
+          </a:xfrm>
+          <a:prstGeom prst="roundRect">
+            <a:avLst>
+              <a:gd name="adj" fmla="val 5000"/>
+            </a:avLst>
+          </a:prstGeom>
+          <a:solidFill>
+            <a:srgbClr val="FEF8F8"/>
+          </a:solidFill>
+          <a:ln w="12700">
+            <a:solidFill>
+              <a:srgbClr val="FDDEDE"/>
+            </a:solidFill>
+            <a:prstDash val="solid"/>
+          </a:ln>
+          <a:effectLst>
+            <a:outerShdw blurRad="101600" dist="25400" dir="2700000" algn="bl" rotWithShape="0">
+              <a:srgbClr val="000000">
+                <a:alpha val="8000"/>
+              </a:srgbClr>
+            </a:outerShdw>
+          </a:effectLst>
+        </p:spPr>
+        <p:txBody>
+          <a:bodyPr/>
+          <a:lstStyle/>
+          <a:p>
+            <a:endParaRPr lang="en-DE" sz="2400"/>
+          </a:p>
+        </p:txBody>
+      </p:sp>
+      <p:sp>
+        <p:nvSpPr>
+          <p:cNvPr id="14" name="Shape 10"/>
+          <p:cNvSpPr/>
+          <p:nvPr/>
+        </p:nvSpPr>
+        <p:spPr>
+          <a:xfrm>
+            <a:off x="755904" y="4291584"/>
+            <a:ext cx="755904" cy="755904"/>
+          </a:xfrm>
+          <a:prstGeom prst="ellipse">
+            <a:avLst/>
+          </a:prstGeom>
+          <a:solidFill>
+            <a:srgbClr val="D94F4F"/>
+          </a:solidFill>
+          <a:ln w="12700">
+            <a:solidFill>
+              <a:srgbClr val="D94F4F"/>
+            </a:solidFill>
+            <a:prstDash val="solid"/>
+          </a:ln>
+        </p:spPr>
+        <p:txBody>
+          <a:bodyPr/>
+          <a:lstStyle/>
+          <a:p>
+            <a:endParaRPr lang="en-DE" sz="2400"/>
+          </a:p>
+        </p:txBody>
+      </p:sp>
+      <p:pic>
+        <p:nvPicPr>
+          <p:cNvPr id="15" name="Image 2" descr="preencoded.png"/>
+          <p:cNvPicPr>
+            <a:picLocks noChangeAspect="1"/>
+          </p:cNvPicPr>
+          <p:nvPr/>
+        </p:nvPicPr>
+        <p:blipFill>
+          <a:blip r:embed="rId5"/>
+          <a:stretch>
+            <a:fillRect/>
+          </a:stretch>
+        </p:blipFill>
+        <p:spPr>
+          <a:xfrm>
+            <a:off x="829056" y="4364736"/>
+            <a:ext cx="609600" cy="609600"/>
+          </a:xfrm>
+          <a:prstGeom prst="rect">
+            <a:avLst/>
+          </a:prstGeom>
+        </p:spPr>
+      </p:pic>
+      <p:sp>
+        <p:nvSpPr>
+          <p:cNvPr id="16" name="Text 11"/>
+          <p:cNvSpPr/>
+          <p:nvPr/>
+        </p:nvSpPr>
+        <p:spPr>
+          <a:xfrm>
+            <a:off x="1682496" y="4328160"/>
+            <a:ext cx="4084320" cy="512064"/>
+          </a:xfrm>
+          <a:prstGeom prst="rect">
+            <a:avLst/>
+          </a:prstGeom>
+          <a:noFill/>
+          <a:ln/>
+        </p:spPr>
+        <p:txBody>
+          <a:bodyPr wrap="square" lIns="0" tIns="0" rIns="0" bIns="0" rtlCol="0" anchor="ctr"/>
+          <a:lstStyle/>
+          <a:p>
+            <a:r>
+              <a:rPr lang="en-US" sz="1867" b="1" dirty="0">
+                <a:solidFill>
+                  <a:srgbClr val="0D2B3E"/>
+                </a:solidFill>
+                <a:latin typeface="Cambria" pitchFamily="34" charset="0"/>
+                <a:ea typeface="Cambria" pitchFamily="34" charset="-122"/>
+                <a:cs typeface="Cambria" pitchFamily="34" charset="-120"/>
+              </a:rPr>
+              <a:t>Management Complexity</a:t>
+            </a:r>
+            <a:endParaRPr lang="en-US" sz="1867" dirty="0"/>
+          </a:p>
+        </p:txBody>
+      </p:sp>
+      <p:sp>
+        <p:nvSpPr>
+          <p:cNvPr id="17" name="Text 12"/>
+          <p:cNvSpPr/>
+          <p:nvPr/>
+        </p:nvSpPr>
+        <p:spPr>
+          <a:xfrm>
+            <a:off x="755904" y="5181600"/>
+            <a:ext cx="4998720" cy="1158240"/>
+          </a:xfrm>
+          <a:prstGeom prst="rect">
+            <a:avLst/>
+          </a:prstGeom>
+          <a:noFill/>
+          <a:ln/>
+        </p:spPr>
+        <p:txBody>
+          <a:bodyPr wrap="square" lIns="0" tIns="0" rIns="0" bIns="0" rtlCol="0" anchor="ctr"/>
+          <a:lstStyle/>
+          <a:p>
+            <a:r>
+              <a:rPr lang="en-US" sz="1467" dirty="0">
+                <a:solidFill>
+                  <a:srgbClr val="5E8FAA"/>
+                </a:solidFill>
+                <a:latin typeface="Calibri" pitchFamily="34" charset="0"/>
+                <a:ea typeface="Calibri" pitchFamily="34" charset="-122"/>
+                <a:cs typeface="Calibri" pitchFamily="34" charset="-120"/>
+              </a:rPr>
+              <a:t>Coordinating software updates, monitoring, and fault detection across hundreds of edge nodes is a significant operational challenge.</a:t>
+            </a:r>
+            <a:endParaRPr lang="en-US" sz="1467" dirty="0"/>
+          </a:p>
+        </p:txBody>
+      </p:sp>
+      <p:sp>
+        <p:nvSpPr>
+          <p:cNvPr id="18" name="Shape 13"/>
+          <p:cNvSpPr/>
+          <p:nvPr/>
+        </p:nvSpPr>
+        <p:spPr>
+          <a:xfrm>
+            <a:off x="6400800" y="4023360"/>
+            <a:ext cx="5486400" cy="2438400"/>
+          </a:xfrm>
+          <a:prstGeom prst="roundRect">
+            <a:avLst>
+              <a:gd name="adj" fmla="val 5000"/>
+            </a:avLst>
+          </a:prstGeom>
+          <a:solidFill>
+            <a:srgbClr val="FEF8F8"/>
+          </a:solidFill>
+          <a:ln w="12700">
+            <a:solidFill>
+              <a:srgbClr val="FDDEDE"/>
+            </a:solidFill>
+            <a:prstDash val="solid"/>
+          </a:ln>
+          <a:effectLst>
+            <a:outerShdw blurRad="101600" dist="25400" dir="2700000" algn="bl" rotWithShape="0">
+              <a:srgbClr val="000000">
+                <a:alpha val="8000"/>
+              </a:srgbClr>
+            </a:outerShdw>
+          </a:effectLst>
+        </p:spPr>
+        <p:txBody>
+          <a:bodyPr/>
+          <a:lstStyle/>
+          <a:p>
+            <a:endParaRPr lang="en-DE" sz="2400"/>
+          </a:p>
+        </p:txBody>
+      </p:sp>
+      <p:sp>
+        <p:nvSpPr>
+          <p:cNvPr id="19" name="Shape 14"/>
+          <p:cNvSpPr/>
+          <p:nvPr/>
+        </p:nvSpPr>
+        <p:spPr>
+          <a:xfrm>
+            <a:off x="6669024" y="4291584"/>
+            <a:ext cx="755904" cy="755904"/>
+          </a:xfrm>
+          <a:prstGeom prst="ellipse">
+            <a:avLst/>
+          </a:prstGeom>
+          <a:solidFill>
+            <a:srgbClr val="D94F4F"/>
+          </a:solidFill>
+          <a:ln w="12700">
+            <a:solidFill>
+              <a:srgbClr val="D94F4F"/>
+            </a:solidFill>
+            <a:prstDash val="solid"/>
+          </a:ln>
+        </p:spPr>
+        <p:txBody>
+          <a:bodyPr/>
+          <a:lstStyle/>
+          <a:p>
+            <a:endParaRPr lang="en-DE" sz="2400"/>
+          </a:p>
+        </p:txBody>
+      </p:sp>
+      <p:pic>
+        <p:nvPicPr>
+          <p:cNvPr id="20" name="Image 3" descr="preencoded.png"/>
+          <p:cNvPicPr>
+            <a:picLocks noChangeAspect="1"/>
+          </p:cNvPicPr>
+          <p:nvPr/>
+        </p:nvPicPr>
+        <p:blipFill>
+          <a:blip r:embed="rId6"/>
+          <a:stretch>
+            <a:fillRect/>
+          </a:stretch>
+        </p:blipFill>
+        <p:spPr>
+          <a:xfrm>
+            <a:off x="6742176" y="4364736"/>
+            <a:ext cx="609600" cy="609600"/>
+          </a:xfrm>
+          <a:prstGeom prst="rect">
+            <a:avLst/>
+          </a:prstGeom>
+        </p:spPr>
+      </p:pic>
+      <p:sp>
+        <p:nvSpPr>
+          <p:cNvPr id="21" name="Text 15"/>
+          <p:cNvSpPr/>
+          <p:nvPr/>
+        </p:nvSpPr>
+        <p:spPr>
+          <a:xfrm>
+            <a:off x="7595616" y="4328160"/>
+            <a:ext cx="4084320" cy="512064"/>
+          </a:xfrm>
+          <a:prstGeom prst="rect">
+            <a:avLst/>
+          </a:prstGeom>
+          <a:noFill/>
+          <a:ln/>
+        </p:spPr>
+        <p:txBody>
+          <a:bodyPr wrap="square" lIns="0" tIns="0" rIns="0" bIns="0" rtlCol="0" anchor="ctr"/>
+          <a:lstStyle/>
+          <a:p>
+            <a:r>
+              <a:rPr lang="en-US" sz="1867" b="1" dirty="0">
+                <a:solidFill>
+                  <a:srgbClr val="0D2B3E"/>
+                </a:solidFill>
+                <a:latin typeface="Cambria" pitchFamily="34" charset="0"/>
+                <a:ea typeface="Cambria" pitchFamily="34" charset="-122"/>
+                <a:cs typeface="Cambria" pitchFamily="34" charset="-120"/>
+              </a:rPr>
+              <a:t>Data Consistency</a:t>
+            </a:r>
+            <a:endParaRPr lang="en-US" sz="1867" dirty="0"/>
+          </a:p>
+        </p:txBody>
+      </p:sp>
+      <p:sp>
+        <p:nvSpPr>
+          <p:cNvPr id="22" name="Text 16"/>
+          <p:cNvSpPr/>
+          <p:nvPr/>
+        </p:nvSpPr>
+        <p:spPr>
+          <a:xfrm>
+            <a:off x="6669024" y="5181600"/>
+            <a:ext cx="4998720" cy="1158240"/>
+          </a:xfrm>
+          <a:prstGeom prst="rect">
+            <a:avLst/>
+          </a:prstGeom>
+          <a:noFill/>
+          <a:ln/>
+        </p:spPr>
+        <p:txBody>
+          <a:bodyPr wrap="square" lIns="0" tIns="0" rIns="0" bIns="0" rtlCol="0" anchor="ctr"/>
+          <a:lstStyle/>
+          <a:p>
+            <a:r>
+              <a:rPr lang="en-US" sz="1467" dirty="0">
+                <a:solidFill>
+                  <a:srgbClr val="5E8FAA"/>
+                </a:solidFill>
+                <a:latin typeface="Calibri" pitchFamily="34" charset="0"/>
+                <a:ea typeface="Calibri" pitchFamily="34" charset="-122"/>
+                <a:cs typeface="Calibri" pitchFamily="34" charset="-120"/>
+              </a:rPr>
+              <a:t>Processing data at multiple sites makes it harder to maintain a single consistent view between edge and cloud systems.</a:t>
+            </a:r>
+            <a:endParaRPr lang="en-US" sz="1467" dirty="0"/>
+          </a:p>
+        </p:txBody>
+      </p:sp>
+    </p:spTree>
+  </p:cSld>
+  <p:clrMapOvr>
+    <a:masterClrMapping/>
+  </p:clrMapOvr>
+</p:sld>
+</file>
+
 <file path=ppt/slides/slide2.xml><?xml version="1.0" encoding="utf-8"?>
 <p:sld xmlns:a="http://schemas.openxmlformats.org/drawingml/2006/main" xmlns:r="http://schemas.openxmlformats.org/officeDocument/2006/relationships" xmlns:p="http://schemas.openxmlformats.org/presentationml/2006/main">
   <p:cSld>
@@ -6067,7 +9150,7 @@
           </a:prstGeom>
           <a:extLst>
             <a:ext uri="{C572A759-6A51-4108-AA02-DFA0A04FC94B}">
-              <ma14:wrappingTextBoxFlag xmlns:ma14="http://schemas.microsoft.com/office/mac/drawingml/2011/main" xmlns="" val="0"/>
+              <ma14:wrappingTextBoxFlag xmlns="" xmlns:ma14="http://schemas.microsoft.com/office/mac/drawingml/2011/main" val="0"/>
             </a:ext>
           </a:extLst>
         </p:spPr>
@@ -10583,6 +13666,301 @@
 </file>
 
 <file path=ppt/theme/theme2.xml><?xml version="1.0" encoding="utf-8"?>
+<a:theme xmlns:a="http://schemas.openxmlformats.org/drawingml/2006/main" name="1_Office Theme">
+  <a:themeElements>
+    <a:clrScheme name="Office">
+      <a:dk1>
+        <a:sysClr val="windowText" lastClr="000000"/>
+      </a:dk1>
+      <a:lt1>
+        <a:sysClr val="window" lastClr="FFFFFF"/>
+      </a:lt1>
+      <a:dk2>
+        <a:srgbClr val="44546A"/>
+      </a:dk2>
+      <a:lt2>
+        <a:srgbClr val="E7E6E6"/>
+      </a:lt2>
+      <a:accent1>
+        <a:srgbClr val="4472C4"/>
+      </a:accent1>
+      <a:accent2>
+        <a:srgbClr val="ED7D31"/>
+      </a:accent2>
+      <a:accent3>
+        <a:srgbClr val="A5A5A5"/>
+      </a:accent3>
+      <a:accent4>
+        <a:srgbClr val="FFC000"/>
+      </a:accent4>
+      <a:accent5>
+        <a:srgbClr val="5B9BD5"/>
+      </a:accent5>
+      <a:accent6>
+        <a:srgbClr val="70AD47"/>
+      </a:accent6>
+      <a:hlink>
+        <a:srgbClr val="0563C1"/>
+      </a:hlink>
+      <a:folHlink>
+        <a:srgbClr val="954F72"/>
+      </a:folHlink>
+    </a:clrScheme>
+    <a:fontScheme name="Office">
+      <a:majorFont>
+        <a:latin typeface="Calibri Light" panose="020F0302020204030204"/>
+        <a:ea typeface=""/>
+        <a:cs typeface=""/>
+        <a:font script="Jpan" typeface="游ゴシック Light"/>
+        <a:font script="Hang" typeface="맑은 고딕"/>
+        <a:font script="Hans" typeface="等线 Light"/>
+        <a:font script="Hant" typeface="新細明體"/>
+        <a:font script="Arab" typeface="Times New Roman"/>
+        <a:font script="Hebr" typeface="Times New Roman"/>
+        <a:font script="Thai" typeface="Angsana New"/>
+        <a:font script="Ethi" typeface="Nyala"/>
+        <a:font script="Beng" typeface="Vrinda"/>
+        <a:font script="Gujr" typeface="Shruti"/>
+        <a:font script="Khmr" typeface="MoolBoran"/>
+        <a:font script="Knda" typeface="Tunga"/>
+        <a:font script="Guru" typeface="Raavi"/>
+        <a:font script="Cans" typeface="Euphemia"/>
+        <a:font script="Cher" typeface="Plantagenet Cherokee"/>
+        <a:font script="Yiii" typeface="Microsoft Yi Baiti"/>
+        <a:font script="Tibt" typeface="Microsoft Himalaya"/>
+        <a:font script="Thaa" typeface="MV Boli"/>
+        <a:font script="Deva" typeface="Mangal"/>
+        <a:font script="Telu" typeface="Gautami"/>
+        <a:font script="Taml" typeface="Latha"/>
+        <a:font script="Syrc" typeface="Estrangelo Edessa"/>
+        <a:font script="Orya" typeface="Kalinga"/>
+        <a:font script="Mlym" typeface="Kartika"/>
+        <a:font script="Laoo" typeface="DokChampa"/>
+        <a:font script="Sinh" typeface="Iskoola Pota"/>
+        <a:font script="Mong" typeface="Mongolian Baiti"/>
+        <a:font script="Viet" typeface="Times New Roman"/>
+        <a:font script="Uigh" typeface="Microsoft Uighur"/>
+        <a:font script="Geor" typeface="Sylfaen"/>
+        <a:font script="Armn" typeface="Arial"/>
+        <a:font script="Bugi" typeface="Leelawadee UI"/>
+        <a:font script="Bopo" typeface="Microsoft JhengHei"/>
+        <a:font script="Java" typeface="Javanese Text"/>
+        <a:font script="Lisu" typeface="Segoe UI"/>
+        <a:font script="Mymr" typeface="Myanmar Text"/>
+        <a:font script="Nkoo" typeface="Ebrima"/>
+        <a:font script="Olck" typeface="Nirmala UI"/>
+        <a:font script="Osma" typeface="Ebrima"/>
+        <a:font script="Phag" typeface="Phagspa"/>
+        <a:font script="Syrn" typeface="Estrangelo Edessa"/>
+        <a:font script="Syrj" typeface="Estrangelo Edessa"/>
+        <a:font script="Syre" typeface="Estrangelo Edessa"/>
+        <a:font script="Sora" typeface="Nirmala UI"/>
+        <a:font script="Tale" typeface="Microsoft Tai Le"/>
+        <a:font script="Talu" typeface="Microsoft New Tai Lue"/>
+        <a:font script="Tfng" typeface="Ebrima"/>
+      </a:majorFont>
+      <a:minorFont>
+        <a:latin typeface="Calibri" panose="020F0502020204030204"/>
+        <a:ea typeface=""/>
+        <a:cs typeface=""/>
+        <a:font script="Jpan" typeface="游ゴシック"/>
+        <a:font script="Hang" typeface="맑은 고딕"/>
+        <a:font script="Hans" typeface="等线"/>
+        <a:font script="Hant" typeface="新細明體"/>
+        <a:font script="Arab" typeface="Arial"/>
+        <a:font script="Hebr" typeface="Arial"/>
+        <a:font script="Thai" typeface="Cordia New"/>
+        <a:font script="Ethi" typeface="Nyala"/>
+        <a:font script="Beng" typeface="Vrinda"/>
+        <a:font script="Gujr" typeface="Shruti"/>
+        <a:font script="Khmr" typeface="DaunPenh"/>
+        <a:font script="Knda" typeface="Tunga"/>
+        <a:font script="Guru" typeface="Raavi"/>
+        <a:font script="Cans" typeface="Euphemia"/>
+        <a:font script="Cher" typeface="Plantagenet Cherokee"/>
+        <a:font script="Yiii" typeface="Microsoft Yi Baiti"/>
+        <a:font script="Tibt" typeface="Microsoft Himalaya"/>
+        <a:font script="Thaa" typeface="MV Boli"/>
+        <a:font script="Deva" typeface="Mangal"/>
+        <a:font script="Telu" typeface="Gautami"/>
+        <a:font script="Taml" typeface="Latha"/>
+        <a:font script="Syrc" typeface="Estrangelo Edessa"/>
+        <a:font script="Orya" typeface="Kalinga"/>
+        <a:font script="Mlym" typeface="Kartika"/>
+        <a:font script="Laoo" typeface="DokChampa"/>
+        <a:font script="Sinh" typeface="Iskoola Pota"/>
+        <a:font script="Mong" typeface="Mongolian Baiti"/>
+        <a:font script="Viet" typeface="Arial"/>
+        <a:font script="Uigh" typeface="Microsoft Uighur"/>
+        <a:font script="Geor" typeface="Sylfaen"/>
+        <a:font script="Armn" typeface="Arial"/>
+        <a:font script="Bugi" typeface="Leelawadee UI"/>
+        <a:font script="Bopo" typeface="Microsoft JhengHei"/>
+        <a:font script="Java" typeface="Javanese Text"/>
+        <a:font script="Lisu" typeface="Segoe UI"/>
+        <a:font script="Mymr" typeface="Myanmar Text"/>
+        <a:font script="Nkoo" typeface="Ebrima"/>
+        <a:font script="Olck" typeface="Nirmala UI"/>
+        <a:font script="Osma" typeface="Ebrima"/>
+        <a:font script="Phag" typeface="Phagspa"/>
+        <a:font script="Syrn" typeface="Estrangelo Edessa"/>
+        <a:font script="Syrj" typeface="Estrangelo Edessa"/>
+        <a:font script="Syre" typeface="Estrangelo Edessa"/>
+        <a:font script="Sora" typeface="Nirmala UI"/>
+        <a:font script="Tale" typeface="Microsoft Tai Le"/>
+        <a:font script="Talu" typeface="Microsoft New Tai Lue"/>
+        <a:font script="Tfng" typeface="Ebrima"/>
+      </a:minorFont>
+    </a:fontScheme>
+    <a:fmtScheme name="Office">
+      <a:fillStyleLst>
+        <a:solidFill>
+          <a:schemeClr val="phClr"/>
+        </a:solidFill>
+        <a:gradFill rotWithShape="1">
+          <a:gsLst>
+            <a:gs pos="0">
+              <a:schemeClr val="phClr">
+                <a:lumMod val="110000"/>
+                <a:satMod val="105000"/>
+                <a:tint val="67000"/>
+              </a:schemeClr>
+            </a:gs>
+            <a:gs pos="50000">
+              <a:schemeClr val="phClr">
+                <a:lumMod val="105000"/>
+                <a:satMod val="103000"/>
+                <a:tint val="73000"/>
+              </a:schemeClr>
+            </a:gs>
+            <a:gs pos="100000">
+              <a:schemeClr val="phClr">
+                <a:lumMod val="105000"/>
+                <a:satMod val="109000"/>
+                <a:tint val="81000"/>
+              </a:schemeClr>
+            </a:gs>
+          </a:gsLst>
+          <a:lin ang="5400000" scaled="0"/>
+        </a:gradFill>
+        <a:gradFill rotWithShape="1">
+          <a:gsLst>
+            <a:gs pos="0">
+              <a:schemeClr val="phClr">
+                <a:satMod val="103000"/>
+                <a:lumMod val="102000"/>
+                <a:tint val="94000"/>
+              </a:schemeClr>
+            </a:gs>
+            <a:gs pos="50000">
+              <a:schemeClr val="phClr">
+                <a:satMod val="110000"/>
+                <a:lumMod val="100000"/>
+                <a:shade val="100000"/>
+              </a:schemeClr>
+            </a:gs>
+            <a:gs pos="100000">
+              <a:schemeClr val="phClr">
+                <a:lumMod val="99000"/>
+                <a:satMod val="120000"/>
+                <a:shade val="78000"/>
+              </a:schemeClr>
+            </a:gs>
+          </a:gsLst>
+          <a:lin ang="5400000" scaled="0"/>
+        </a:gradFill>
+      </a:fillStyleLst>
+      <a:lnStyleLst>
+        <a:ln w="6350" cap="flat" cmpd="sng" algn="ctr">
+          <a:solidFill>
+            <a:schemeClr val="phClr"/>
+          </a:solidFill>
+          <a:prstDash val="solid"/>
+          <a:miter lim="800000"/>
+        </a:ln>
+        <a:ln w="12700" cap="flat" cmpd="sng" algn="ctr">
+          <a:solidFill>
+            <a:schemeClr val="phClr"/>
+          </a:solidFill>
+          <a:prstDash val="solid"/>
+          <a:miter lim="800000"/>
+        </a:ln>
+        <a:ln w="19050" cap="flat" cmpd="sng" algn="ctr">
+          <a:solidFill>
+            <a:schemeClr val="phClr"/>
+          </a:solidFill>
+          <a:prstDash val="solid"/>
+          <a:miter lim="800000"/>
+        </a:ln>
+      </a:lnStyleLst>
+      <a:effectStyleLst>
+        <a:effectStyle>
+          <a:effectLst/>
+        </a:effectStyle>
+        <a:effectStyle>
+          <a:effectLst/>
+        </a:effectStyle>
+        <a:effectStyle>
+          <a:effectLst>
+            <a:outerShdw blurRad="57150" dist="19050" dir="5400000" algn="ctr" rotWithShape="0">
+              <a:srgbClr val="000000">
+                <a:alpha val="63000"/>
+              </a:srgbClr>
+            </a:outerShdw>
+          </a:effectLst>
+        </a:effectStyle>
+      </a:effectStyleLst>
+      <a:bgFillStyleLst>
+        <a:solidFill>
+          <a:schemeClr val="phClr"/>
+        </a:solidFill>
+        <a:solidFill>
+          <a:schemeClr val="phClr">
+            <a:tint val="95000"/>
+            <a:satMod val="170000"/>
+          </a:schemeClr>
+        </a:solidFill>
+        <a:gradFill rotWithShape="1">
+          <a:gsLst>
+            <a:gs pos="0">
+              <a:schemeClr val="phClr">
+                <a:tint val="93000"/>
+                <a:satMod val="150000"/>
+                <a:shade val="98000"/>
+                <a:lumMod val="102000"/>
+              </a:schemeClr>
+            </a:gs>
+            <a:gs pos="50000">
+              <a:schemeClr val="phClr">
+                <a:tint val="98000"/>
+                <a:satMod val="130000"/>
+                <a:shade val="90000"/>
+                <a:lumMod val="103000"/>
+              </a:schemeClr>
+            </a:gs>
+            <a:gs pos="100000">
+              <a:schemeClr val="phClr">
+                <a:shade val="63000"/>
+                <a:satMod val="120000"/>
+              </a:schemeClr>
+            </a:gs>
+          </a:gsLst>
+          <a:lin ang="5400000" scaled="0"/>
+        </a:gradFill>
+      </a:bgFillStyleLst>
+    </a:fmtScheme>
+  </a:themeElements>
+  <a:objectDefaults/>
+  <a:extraClrSchemeLst/>
+  <a:extLst>
+    <a:ext uri="{05A4C25C-085E-4340-85A3-A5531E510DB2}">
+      <thm15:themeFamily xmlns:thm15="http://schemas.microsoft.com/office/thememl/2012/main" name="Office Theme" id="{62F939B6-93AF-4DB8-9C6B-D6C7DFDC589F}" vid="{4A3C46E8-61CC-4603-A589-7422A47A8E4A}"/>
+    </a:ext>
+  </a:extLst>
+</a:theme>
+</file>
+
+<file path=ppt/theme/theme3.xml><?xml version="1.0" encoding="utf-8"?>
 <a:theme xmlns:a="http://schemas.openxmlformats.org/drawingml/2006/main" name="Office Theme">
   <a:themeElements>
     <a:clrScheme name="Office">

--- a/Presentation/Edge_Computing_in_Industrial_Communication.pptx
+++ b/Presentation/Edge_Computing_in_Industrial_Communication.pptx
@@ -6,7 +6,7 @@
     <p:sldMasterId id="2147483701" r:id="rId2"/>
   </p:sldMasterIdLst>
   <p:notesMasterIdLst>
-    <p:notesMasterId r:id="rId18"/>
+    <p:notesMasterId r:id="rId19"/>
   </p:notesMasterIdLst>
   <p:sldIdLst>
     <p:sldId id="272" r:id="rId3"/>
@@ -20,10 +20,11 @@
     <p:sldId id="260" r:id="rId11"/>
     <p:sldId id="263" r:id="rId12"/>
     <p:sldId id="267" r:id="rId13"/>
-    <p:sldId id="271" r:id="rId14"/>
-    <p:sldId id="262" r:id="rId15"/>
-    <p:sldId id="266" r:id="rId16"/>
-    <p:sldId id="274" r:id="rId17"/>
+    <p:sldId id="265" r:id="rId14"/>
+    <p:sldId id="271" r:id="rId15"/>
+    <p:sldId id="262" r:id="rId16"/>
+    <p:sldId id="266" r:id="rId17"/>
+    <p:sldId id="274" r:id="rId18"/>
   </p:sldIdLst>
   <p:sldSz cx="12192000" cy="6858000"/>
   <p:notesSz cx="6858000" cy="12192000"/>
@@ -805,7 +806,7 @@
           <a:p>
             <a:r>
               <a:rPr lang="en-US" dirty="0"/>
-              <a:t>These four benefits make edge computing indispensable for industrial real-time systems.</a:t>
+              <a:t>Cloud-only processing cannot handle any of these scenarios — latency is simply too high for real-time safety decisions.</a:t>
             </a:r>
           </a:p>
         </p:txBody>
@@ -892,7 +893,7 @@
           <a:p>
             <a:r>
               <a:rPr lang="en-US" dirty="0"/>
-              <a:t>Edge computing is now deployed across virtually every sector where timely local decisions matter.</a:t>
+              <a:t>These four benefits make edge computing indispensable for industrial real-time systems.</a:t>
             </a:r>
           </a:p>
         </p:txBody>
@@ -912,71 +913,11 @@
           <a:bodyPr/>
           <a:lstStyle/>
           <a:p>
-            <a:pPr marL="0" marR="0" lvl="0" indent="0" algn="l" defTabSz="914400" rtl="0" eaLnBrk="1" fontAlgn="auto" latinLnBrk="0" hangingPunct="1">
-              <a:lnSpc>
-                <a:spcPct val="100000"/>
-              </a:lnSpc>
-              <a:spcBef>
-                <a:spcPts val="0"/>
-              </a:spcBef>
-              <a:spcAft>
-                <a:spcPts val="0"/>
-              </a:spcAft>
-              <a:buClrTx/>
-              <a:buSzTx/>
-              <a:buFontTx/>
-              <a:buNone/>
-              <a:tabLst/>
-              <a:defRPr/>
-            </a:pPr>
             <a:fld id="{F7021451-1387-4CA6-816F-3879F97B5CBC}" type="slidenum">
-              <a:rPr kumimoji="0" lang="en-US" sz="1800" b="0" i="0" u="none" strike="noStrike" kern="1200" cap="none" spc="0" normalizeH="0" baseline="0" noProof="0">
-                <a:ln>
-                  <a:noFill/>
-                </a:ln>
-                <a:solidFill>
-                  <a:prstClr val="black"/>
-                </a:solidFill>
-                <a:effectLst/>
-                <a:uLnTx/>
-                <a:uFillTx/>
-                <a:latin typeface="Aptos" panose="02110004020202020204"/>
-                <a:ea typeface="+mn-ea"/>
-                <a:cs typeface="+mn-cs"/>
-              </a:rPr>
-              <a:pPr marL="0" marR="0" lvl="0" indent="0" algn="l" defTabSz="914400" rtl="0" eaLnBrk="1" fontAlgn="auto" latinLnBrk="0" hangingPunct="1">
-                <a:lnSpc>
-                  <a:spcPct val="100000"/>
-                </a:lnSpc>
-                <a:spcBef>
-                  <a:spcPts val="0"/>
-                </a:spcBef>
-                <a:spcAft>
-                  <a:spcPts val="0"/>
-                </a:spcAft>
-                <a:buClrTx/>
-                <a:buSzTx/>
-                <a:buFontTx/>
-                <a:buNone/>
-                <a:tabLst/>
-                <a:defRPr/>
-              </a:pPr>
+              <a:rPr lang="en-US"/>
               <a:t>13</a:t>
             </a:fld>
-            <a:endParaRPr kumimoji="0" lang="en-US" sz="1800" b="0" i="0" u="none" strike="noStrike" kern="1200" cap="none" spc="0" normalizeH="0" baseline="0" noProof="0">
-              <a:ln>
-                <a:noFill/>
-              </a:ln>
-              <a:solidFill>
-                <a:prstClr val="black"/>
-              </a:solidFill>
-              <a:effectLst/>
-              <a:uLnTx/>
-              <a:uFillTx/>
-              <a:latin typeface="Aptos" panose="02110004020202020204"/>
-              <a:ea typeface="+mn-ea"/>
-              <a:cs typeface="+mn-cs"/>
-            </a:endParaRPr>
+            <a:endParaRPr lang="en-US"/>
           </a:p>
         </p:txBody>
       </p:sp>
@@ -1039,7 +980,7 @@
           <a:p>
             <a:r>
               <a:rPr lang="en-US" dirty="0"/>
-              <a:t>These challenges are real but solvable — dedicated private networks, hardware security modules, and centralised device management platforms address most of them.</a:t>
+              <a:t>Edge computing is now deployed across virtually every sector where timely local decisions matter.</a:t>
             </a:r>
           </a:p>
         </p:txBody>
@@ -1059,11 +1000,71 @@
           <a:bodyPr/>
           <a:lstStyle/>
           <a:p>
+            <a:pPr marL="0" marR="0" lvl="0" indent="0" algn="l" defTabSz="914400" rtl="0" eaLnBrk="1" fontAlgn="auto" latinLnBrk="0" hangingPunct="1">
+              <a:lnSpc>
+                <a:spcPct val="100000"/>
+              </a:lnSpc>
+              <a:spcBef>
+                <a:spcPts val="0"/>
+              </a:spcBef>
+              <a:spcAft>
+                <a:spcPts val="0"/>
+              </a:spcAft>
+              <a:buClrTx/>
+              <a:buSzTx/>
+              <a:buFontTx/>
+              <a:buNone/>
+              <a:tabLst/>
+              <a:defRPr/>
+            </a:pPr>
             <a:fld id="{F7021451-1387-4CA6-816F-3879F97B5CBC}" type="slidenum">
-              <a:rPr lang="en-US"/>
+              <a:rPr kumimoji="0" lang="en-US" sz="1800" b="0" i="0" u="none" strike="noStrike" kern="1200" cap="none" spc="0" normalizeH="0" baseline="0" noProof="0">
+                <a:ln>
+                  <a:noFill/>
+                </a:ln>
+                <a:solidFill>
+                  <a:prstClr val="black"/>
+                </a:solidFill>
+                <a:effectLst/>
+                <a:uLnTx/>
+                <a:uFillTx/>
+                <a:latin typeface="Aptos" panose="02110004020202020204"/>
+                <a:ea typeface="+mn-ea"/>
+                <a:cs typeface="+mn-cs"/>
+              </a:rPr>
+              <a:pPr marL="0" marR="0" lvl="0" indent="0" algn="l" defTabSz="914400" rtl="0" eaLnBrk="1" fontAlgn="auto" latinLnBrk="0" hangingPunct="1">
+                <a:lnSpc>
+                  <a:spcPct val="100000"/>
+                </a:lnSpc>
+                <a:spcBef>
+                  <a:spcPts val="0"/>
+                </a:spcBef>
+                <a:spcAft>
+                  <a:spcPts val="0"/>
+                </a:spcAft>
+                <a:buClrTx/>
+                <a:buSzTx/>
+                <a:buFontTx/>
+                <a:buNone/>
+                <a:tabLst/>
+                <a:defRPr/>
+              </a:pPr>
               <a:t>14</a:t>
             </a:fld>
-            <a:endParaRPr lang="en-US"/>
+            <a:endParaRPr kumimoji="0" lang="en-US" sz="1800" b="0" i="0" u="none" strike="noStrike" kern="1200" cap="none" spc="0" normalizeH="0" baseline="0" noProof="0">
+              <a:ln>
+                <a:noFill/>
+              </a:ln>
+              <a:solidFill>
+                <a:prstClr val="black"/>
+              </a:solidFill>
+              <a:effectLst/>
+              <a:uLnTx/>
+              <a:uFillTx/>
+              <a:latin typeface="Aptos" panose="02110004020202020204"/>
+              <a:ea typeface="+mn-ea"/>
+              <a:cs typeface="+mn-cs"/>
+            </a:endParaRPr>
           </a:p>
         </p:txBody>
       </p:sp>
@@ -1126,7 +1127,7 @@
           <a:p>
             <a:r>
               <a:rPr lang="en-US" dirty="0"/>
-              <a:t>Wrap up: edge + cloud is complementary. Key stat: 5.1–5.4× speed advantage confirmed in real measurements.</a:t>
+              <a:t>These challenges are real but solvable — dedicated private networks, hardware security modules, and centralised device management platforms address most of them.</a:t>
             </a:r>
           </a:p>
         </p:txBody>
@@ -1149,6 +1150,93 @@
             <a:fld id="{F7021451-1387-4CA6-816F-3879F97B5CBC}" type="slidenum">
               <a:rPr lang="en-US"/>
               <a:t>15</a:t>
+            </a:fld>
+            <a:endParaRPr lang="en-US"/>
+          </a:p>
+        </p:txBody>
+      </p:sp>
+    </p:spTree>
+    <p:extLst>
+      <p:ext uri="{BB962C8B-B14F-4D97-AF65-F5344CB8AC3E}">
+        <p14:creationId xmlns:p14="http://schemas.microsoft.com/office/powerpoint/2010/main" val="1024086991"/>
+      </p:ext>
+    </p:extLst>
+  </p:cSld>
+  <p:clrMapOvr>
+    <a:masterClrMapping/>
+  </p:clrMapOvr>
+</p:notes>
+</file>
+
+<file path=ppt/notesSlides/notesSlide15.xml><?xml version="1.0" encoding="utf-8"?>
+<p:notes xmlns:a="http://schemas.openxmlformats.org/drawingml/2006/main" xmlns:r="http://schemas.openxmlformats.org/officeDocument/2006/relationships" xmlns:p="http://schemas.openxmlformats.org/presentationml/2006/main">
+  <p:cSld>
+    <p:spTree>
+      <p:nvGrpSpPr>
+        <p:cNvPr id="1" name=""/>
+        <p:cNvGrpSpPr/>
+        <p:nvPr/>
+      </p:nvGrpSpPr>
+      <p:grpSpPr>
+        <a:xfrm>
+          <a:off x="0" y="0"/>
+          <a:ext cx="0" cy="0"/>
+          <a:chOff x="0" y="0"/>
+          <a:chExt cx="0" cy="0"/>
+        </a:xfrm>
+      </p:grpSpPr>
+      <p:sp>
+        <p:nvSpPr>
+          <p:cNvPr id="2" name="Slide Image Placeholder 1"/>
+          <p:cNvSpPr>
+            <a:spLocks noGrp="1" noRot="1" noChangeAspect="1"/>
+          </p:cNvSpPr>
+          <p:nvPr>
+            <p:ph type="sldImg"/>
+          </p:nvPr>
+        </p:nvSpPr>
+        <p:spPr/>
+      </p:sp>
+      <p:sp>
+        <p:nvSpPr>
+          <p:cNvPr id="3" name="Notes Placeholder 2"/>
+          <p:cNvSpPr>
+            <a:spLocks noGrp="1"/>
+          </p:cNvSpPr>
+          <p:nvPr>
+            <p:ph type="body" idx="1"/>
+          </p:nvPr>
+        </p:nvSpPr>
+        <p:spPr/>
+        <p:txBody>
+          <a:bodyPr/>
+          <a:lstStyle/>
+          <a:p>
+            <a:r>
+              <a:rPr lang="en-US" dirty="0"/>
+              <a:t>Wrap up: edge + cloud is complementary. Key stat: 5.1–5.4× speed advantage confirmed in real measurements.</a:t>
+            </a:r>
+          </a:p>
+        </p:txBody>
+      </p:sp>
+      <p:sp>
+        <p:nvSpPr>
+          <p:cNvPr id="4" name="Slide Number Placeholder 3"/>
+          <p:cNvSpPr>
+            <a:spLocks noGrp="1"/>
+          </p:cNvSpPr>
+          <p:nvPr>
+            <p:ph type="sldNum" sz="quarter" idx="10"/>
+          </p:nvPr>
+        </p:nvSpPr>
+        <p:spPr/>
+        <p:txBody>
+          <a:bodyPr/>
+          <a:lstStyle/>
+          <a:p>
+            <a:fld id="{F7021451-1387-4CA6-816F-3879F97B5CBC}" type="slidenum">
+              <a:rPr lang="en-US"/>
+              <a:t>16</a:t>
             </a:fld>
             <a:endParaRPr lang="en-US"/>
           </a:p>
@@ -5314,8 +5402,8 @@
         </p:nvSpPr>
         <p:spPr>
           <a:xfrm>
-            <a:off x="623455" y="2379518"/>
-            <a:ext cx="1057405" cy="369332"/>
+            <a:off x="613064" y="2826327"/>
+            <a:ext cx="1576522" cy="523220"/>
           </a:xfrm>
           <a:prstGeom prst="rect">
             <a:avLst/>
@@ -5329,10 +5417,116 @@
           <a:lstStyle/>
           <a:p>
             <a:r>
-              <a:rPr lang="en-US" u="sng" dirty="0"/>
+              <a:rPr lang="en-US" sz="2800" b="1" u="sng" dirty="0"/>
               <a:t>TEAM-A5</a:t>
             </a:r>
-            <a:endParaRPr lang="en-DE" u="sng" dirty="0"/>
+            <a:endParaRPr lang="en-DE" sz="2800" b="1" u="sng" dirty="0"/>
+          </a:p>
+        </p:txBody>
+      </p:sp>
+      <p:sp>
+        <p:nvSpPr>
+          <p:cNvPr id="2" name="TextBox 1">
+            <a:extLst>
+              <a:ext uri="{FF2B5EF4-FFF2-40B4-BE49-F238E27FC236}">
+                <a16:creationId xmlns:a16="http://schemas.microsoft.com/office/drawing/2014/main" id="{FBAAA4F4-FDDC-F03A-6344-95C48199B9E9}"/>
+              </a:ext>
+            </a:extLst>
+          </p:cNvPr>
+          <p:cNvSpPr txBox="1"/>
+          <p:nvPr/>
+        </p:nvSpPr>
+        <p:spPr>
+          <a:xfrm>
+            <a:off x="613064" y="3508454"/>
+            <a:ext cx="2954655" cy="1323439"/>
+          </a:xfrm>
+          <a:prstGeom prst="rect">
+            <a:avLst/>
+          </a:prstGeom>
+          <a:noFill/>
+        </p:spPr>
+        <p:txBody>
+          <a:bodyPr wrap="none" rtlCol="0">
+            <a:spAutoFit/>
+          </a:bodyPr>
+          <a:lstStyle/>
+          <a:p>
+            <a:pPr marL="285750" indent="-285750">
+              <a:buFont typeface="Wingdings" panose="05000000000000000000" pitchFamily="2" charset="2"/>
+              <a:buChar char="q"/>
+            </a:pPr>
+            <a:r>
+              <a:rPr lang="de-DE" sz="2000" dirty="0"/>
+              <a:t>Md Mostafizur Rahman	</a:t>
+            </a:r>
+          </a:p>
+          <a:p>
+            <a:pPr marL="285750" indent="-285750">
+              <a:buFont typeface="Wingdings" panose="05000000000000000000" pitchFamily="2" charset="2"/>
+              <a:buChar char="q"/>
+            </a:pPr>
+            <a:r>
+              <a:rPr lang="de-DE" sz="2000" dirty="0"/>
+              <a:t>Turja Barua	</a:t>
+            </a:r>
+          </a:p>
+          <a:p>
+            <a:pPr marL="285750" indent="-285750">
+              <a:buFont typeface="Wingdings" panose="05000000000000000000" pitchFamily="2" charset="2"/>
+              <a:buChar char="q"/>
+            </a:pPr>
+            <a:r>
+              <a:rPr lang="de-DE" sz="2000" dirty="0"/>
+              <a:t>Deepak Kapil	</a:t>
+            </a:r>
+          </a:p>
+          <a:p>
+            <a:pPr marL="285750" indent="-285750">
+              <a:buFont typeface="Wingdings" panose="05000000000000000000" pitchFamily="2" charset="2"/>
+              <a:buChar char="q"/>
+            </a:pPr>
+            <a:r>
+              <a:rPr lang="de-DE" sz="2000" dirty="0"/>
+              <a:t>Moaz Chowdhury</a:t>
+            </a:r>
+            <a:endParaRPr lang="en-DE" sz="2000" dirty="0"/>
+          </a:p>
+        </p:txBody>
+      </p:sp>
+      <p:sp>
+        <p:nvSpPr>
+          <p:cNvPr id="4" name="TextBox 3">
+            <a:extLst>
+              <a:ext uri="{FF2B5EF4-FFF2-40B4-BE49-F238E27FC236}">
+                <a16:creationId xmlns:a16="http://schemas.microsoft.com/office/drawing/2014/main" id="{096B818D-CD01-B9C1-8E5F-7E9C6109E93A}"/>
+              </a:ext>
+            </a:extLst>
+          </p:cNvPr>
+          <p:cNvSpPr txBox="1"/>
+          <p:nvPr/>
+        </p:nvSpPr>
+        <p:spPr>
+          <a:xfrm>
+            <a:off x="4031673" y="6400800"/>
+            <a:ext cx="3506344" cy="369332"/>
+          </a:xfrm>
+          <a:prstGeom prst="rect">
+            <a:avLst/>
+          </a:prstGeom>
+          <a:noFill/>
+        </p:spPr>
+        <p:txBody>
+          <a:bodyPr wrap="none" rtlCol="0">
+            <a:spAutoFit/>
+          </a:bodyPr>
+          <a:lstStyle/>
+          <a:p>
+            <a:r>
+              <a:rPr lang="en-US" dirty="0"/>
+              <a:t>Industrial Communication Standard</a:t>
+            </a:r>
+            <a:endParaRPr lang="en-DE" dirty="0"/>
           </a:p>
         </p:txBody>
       </p:sp>
@@ -7970,6 +8164,647 @@
           <a:lstStyle/>
           <a:p>
             <a:r>
+              <a:rPr lang="en-US" sz="4533" b="1" dirty="0">
+                <a:solidFill>
+                  <a:srgbClr val="0D2B3E"/>
+                </a:solidFill>
+                <a:latin typeface="Cambria" pitchFamily="34" charset="0"/>
+                <a:ea typeface="Cambria" pitchFamily="34" charset="-122"/>
+                <a:cs typeface="Cambria" pitchFamily="34" charset="-120"/>
+              </a:rPr>
+              <a:t>Industrial Use Cases</a:t>
+            </a:r>
+            <a:endParaRPr lang="en-US" sz="4533" dirty="0"/>
+          </a:p>
+        </p:txBody>
+      </p:sp>
+      <p:sp>
+        <p:nvSpPr>
+          <p:cNvPr id="3" name="Shape 1"/>
+          <p:cNvSpPr/>
+          <p:nvPr/>
+        </p:nvSpPr>
+        <p:spPr>
+          <a:xfrm>
+            <a:off x="487680" y="1280160"/>
+            <a:ext cx="5486400" cy="2438400"/>
+          </a:xfrm>
+          <a:prstGeom prst="roundRect">
+            <a:avLst>
+              <a:gd name="adj" fmla="val 5000"/>
+            </a:avLst>
+          </a:prstGeom>
+          <a:solidFill>
+            <a:srgbClr val="FFFFFF"/>
+          </a:solidFill>
+          <a:ln/>
+          <a:effectLst>
+            <a:outerShdw blurRad="127000" dist="38100" dir="2700000" algn="bl" rotWithShape="0">
+              <a:srgbClr val="000000">
+                <a:alpha val="8000"/>
+              </a:srgbClr>
+            </a:outerShdw>
+          </a:effectLst>
+        </p:spPr>
+        <p:txBody>
+          <a:bodyPr/>
+          <a:lstStyle/>
+          <a:p>
+            <a:endParaRPr lang="en-DE" sz="2400"/>
+          </a:p>
+        </p:txBody>
+      </p:sp>
+      <p:sp>
+        <p:nvSpPr>
+          <p:cNvPr id="4" name="Text 2"/>
+          <p:cNvSpPr/>
+          <p:nvPr/>
+        </p:nvSpPr>
+        <p:spPr>
+          <a:xfrm>
+            <a:off x="670560" y="1499616"/>
+            <a:ext cx="792480" cy="731520"/>
+          </a:xfrm>
+          <a:prstGeom prst="rect">
+            <a:avLst/>
+          </a:prstGeom>
+          <a:noFill/>
+          <a:ln/>
+        </p:spPr>
+        <p:txBody>
+          <a:bodyPr wrap="square" lIns="0" tIns="0" rIns="0" bIns="0" rtlCol="0" anchor="ctr"/>
+          <a:lstStyle/>
+          <a:p>
+            <a:pPr algn="ctr"/>
+            <a:r>
+              <a:rPr lang="en-US" sz="3467" dirty="0">
+                <a:solidFill>
+                  <a:srgbClr val="000000"/>
+                </a:solidFill>
+                <a:latin typeface="Calibri" pitchFamily="34" charset="0"/>
+                <a:ea typeface="Calibri" pitchFamily="34" charset="-122"/>
+                <a:cs typeface="Calibri" pitchFamily="34" charset="-120"/>
+              </a:rPr>
+              <a:t>🔩</a:t>
+            </a:r>
+            <a:endParaRPr lang="en-US" sz="3467" dirty="0"/>
+          </a:p>
+        </p:txBody>
+      </p:sp>
+      <p:sp>
+        <p:nvSpPr>
+          <p:cNvPr id="5" name="Text 3"/>
+          <p:cNvSpPr/>
+          <p:nvPr/>
+        </p:nvSpPr>
+        <p:spPr>
+          <a:xfrm>
+            <a:off x="1524000" y="1499616"/>
+            <a:ext cx="4206240" cy="512064"/>
+          </a:xfrm>
+          <a:prstGeom prst="rect">
+            <a:avLst/>
+          </a:prstGeom>
+          <a:noFill/>
+          <a:ln/>
+        </p:spPr>
+        <p:txBody>
+          <a:bodyPr wrap="square" lIns="0" tIns="0" rIns="0" bIns="0" rtlCol="0" anchor="ctr"/>
+          <a:lstStyle/>
+          <a:p>
+            <a:r>
+              <a:rPr lang="en-US" sz="1867" b="1" dirty="0">
+                <a:solidFill>
+                  <a:srgbClr val="0D2B3E"/>
+                </a:solidFill>
+                <a:latin typeface="Cambria" pitchFamily="34" charset="0"/>
+                <a:ea typeface="Cambria" pitchFamily="34" charset="-122"/>
+                <a:cs typeface="Cambria" pitchFamily="34" charset="-120"/>
+              </a:rPr>
+              <a:t>PCB &amp; SMT Assembly</a:t>
+            </a:r>
+            <a:endParaRPr lang="en-US" sz="1867" dirty="0"/>
+          </a:p>
+        </p:txBody>
+      </p:sp>
+      <p:sp>
+        <p:nvSpPr>
+          <p:cNvPr id="6" name="Text 4"/>
+          <p:cNvSpPr/>
+          <p:nvPr/>
+        </p:nvSpPr>
+        <p:spPr>
+          <a:xfrm>
+            <a:off x="755904" y="2157984"/>
+            <a:ext cx="4974336" cy="1402080"/>
+          </a:xfrm>
+          <a:prstGeom prst="rect">
+            <a:avLst/>
+          </a:prstGeom>
+          <a:noFill/>
+          <a:ln/>
+        </p:spPr>
+        <p:txBody>
+          <a:bodyPr wrap="square" lIns="0" tIns="0" rIns="0" bIns="0" rtlCol="0" anchor="ctr"/>
+          <a:lstStyle/>
+          <a:p>
+            <a:r>
+              <a:rPr lang="en-US" sz="1400" dirty="0">
+                <a:solidFill>
+                  <a:srgbClr val="5E8FAA"/>
+                </a:solidFill>
+                <a:latin typeface="Calibri" pitchFamily="34" charset="0"/>
+                <a:ea typeface="Calibri" pitchFamily="34" charset="-122"/>
+                <a:cs typeface="Calibri" pitchFamily="34" charset="-120"/>
+              </a:rPr>
+              <a:t>Camera inspection detects misplaced components, missing solder, or bad orientation. The edge system rejects the board instantly — before bad units continue down the line.</a:t>
+            </a:r>
+            <a:endParaRPr lang="en-US" sz="1400" dirty="0"/>
+          </a:p>
+        </p:txBody>
+      </p:sp>
+      <p:sp>
+        <p:nvSpPr>
+          <p:cNvPr id="7" name="Shape 5"/>
+          <p:cNvSpPr/>
+          <p:nvPr/>
+        </p:nvSpPr>
+        <p:spPr>
+          <a:xfrm>
+            <a:off x="6400800" y="1280160"/>
+            <a:ext cx="5486400" cy="2438400"/>
+          </a:xfrm>
+          <a:prstGeom prst="roundRect">
+            <a:avLst>
+              <a:gd name="adj" fmla="val 5000"/>
+            </a:avLst>
+          </a:prstGeom>
+          <a:solidFill>
+            <a:srgbClr val="FFFFFF"/>
+          </a:solidFill>
+          <a:ln/>
+          <a:effectLst>
+            <a:outerShdw blurRad="127000" dist="38100" dir="2700000" algn="bl" rotWithShape="0">
+              <a:srgbClr val="000000">
+                <a:alpha val="8000"/>
+              </a:srgbClr>
+            </a:outerShdw>
+          </a:effectLst>
+        </p:spPr>
+        <p:txBody>
+          <a:bodyPr/>
+          <a:lstStyle/>
+          <a:p>
+            <a:endParaRPr lang="en-DE" sz="2400"/>
+          </a:p>
+        </p:txBody>
+      </p:sp>
+      <p:sp>
+        <p:nvSpPr>
+          <p:cNvPr id="8" name="Text 6"/>
+          <p:cNvSpPr/>
+          <p:nvPr/>
+        </p:nvSpPr>
+        <p:spPr>
+          <a:xfrm>
+            <a:off x="6583680" y="1499616"/>
+            <a:ext cx="792480" cy="731520"/>
+          </a:xfrm>
+          <a:prstGeom prst="rect">
+            <a:avLst/>
+          </a:prstGeom>
+          <a:noFill/>
+          <a:ln/>
+        </p:spPr>
+        <p:txBody>
+          <a:bodyPr wrap="square" lIns="0" tIns="0" rIns="0" bIns="0" rtlCol="0" anchor="ctr"/>
+          <a:lstStyle/>
+          <a:p>
+            <a:pPr algn="ctr"/>
+            <a:r>
+              <a:rPr lang="en-US" sz="3467" dirty="0">
+                <a:solidFill>
+                  <a:srgbClr val="000000"/>
+                </a:solidFill>
+                <a:latin typeface="Calibri" pitchFamily="34" charset="0"/>
+                <a:ea typeface="Calibri" pitchFamily="34" charset="-122"/>
+                <a:cs typeface="Calibri" pitchFamily="34" charset="-120"/>
+              </a:rPr>
+              <a:t>⚙️</a:t>
+            </a:r>
+            <a:endParaRPr lang="en-US" sz="3467" dirty="0"/>
+          </a:p>
+        </p:txBody>
+      </p:sp>
+      <p:sp>
+        <p:nvSpPr>
+          <p:cNvPr id="9" name="Text 7"/>
+          <p:cNvSpPr/>
+          <p:nvPr/>
+        </p:nvSpPr>
+        <p:spPr>
+          <a:xfrm>
+            <a:off x="7437120" y="1499616"/>
+            <a:ext cx="4206240" cy="512064"/>
+          </a:xfrm>
+          <a:prstGeom prst="rect">
+            <a:avLst/>
+          </a:prstGeom>
+          <a:noFill/>
+          <a:ln/>
+        </p:spPr>
+        <p:txBody>
+          <a:bodyPr wrap="square" lIns="0" tIns="0" rIns="0" bIns="0" rtlCol="0" anchor="ctr"/>
+          <a:lstStyle/>
+          <a:p>
+            <a:r>
+              <a:rPr lang="en-US" sz="1867" b="1" dirty="0">
+                <a:solidFill>
+                  <a:srgbClr val="0D2B3E"/>
+                </a:solidFill>
+                <a:latin typeface="Cambria" pitchFamily="34" charset="0"/>
+                <a:ea typeface="Cambria" pitchFamily="34" charset="-122"/>
+                <a:cs typeface="Cambria" pitchFamily="34" charset="-120"/>
+              </a:rPr>
+              <a:t>CNC Machining</a:t>
+            </a:r>
+            <a:endParaRPr lang="en-US" sz="1867" dirty="0"/>
+          </a:p>
+        </p:txBody>
+      </p:sp>
+      <p:sp>
+        <p:nvSpPr>
+          <p:cNvPr id="10" name="Text 8"/>
+          <p:cNvSpPr/>
+          <p:nvPr/>
+        </p:nvSpPr>
+        <p:spPr>
+          <a:xfrm>
+            <a:off x="6669024" y="2157984"/>
+            <a:ext cx="4974336" cy="1402080"/>
+          </a:xfrm>
+          <a:prstGeom prst="rect">
+            <a:avLst/>
+          </a:prstGeom>
+          <a:noFill/>
+          <a:ln/>
+        </p:spPr>
+        <p:txBody>
+          <a:bodyPr wrap="square" lIns="0" tIns="0" rIns="0" bIns="0" rtlCol="0" anchor="ctr"/>
+          <a:lstStyle/>
+          <a:p>
+            <a:r>
+              <a:rPr lang="en-US" sz="1400" dirty="0">
+                <a:solidFill>
+                  <a:srgbClr val="5E8FAA"/>
+                </a:solidFill>
+                <a:latin typeface="Calibri" pitchFamily="34" charset="0"/>
+                <a:ea typeface="Calibri" pitchFamily="34" charset="-122"/>
+                <a:cs typeface="Calibri" pitchFamily="34" charset="-120"/>
+              </a:rPr>
+              <a:t>Vibration, temperature, and current sensors feed into an edge node that predicts tool wear before breakage, alerting operators to swap tools proactively.</a:t>
+            </a:r>
+            <a:endParaRPr lang="en-US" sz="1400" dirty="0"/>
+          </a:p>
+        </p:txBody>
+      </p:sp>
+      <p:sp>
+        <p:nvSpPr>
+          <p:cNvPr id="11" name="Shape 9"/>
+          <p:cNvSpPr/>
+          <p:nvPr/>
+        </p:nvSpPr>
+        <p:spPr>
+          <a:xfrm>
+            <a:off x="487680" y="3962400"/>
+            <a:ext cx="5486400" cy="2438400"/>
+          </a:xfrm>
+          <a:prstGeom prst="roundRect">
+            <a:avLst>
+              <a:gd name="adj" fmla="val 5000"/>
+            </a:avLst>
+          </a:prstGeom>
+          <a:solidFill>
+            <a:srgbClr val="FFFFFF"/>
+          </a:solidFill>
+          <a:ln/>
+          <a:effectLst>
+            <a:outerShdw blurRad="127000" dist="38100" dir="2700000" algn="bl" rotWithShape="0">
+              <a:srgbClr val="000000">
+                <a:alpha val="8000"/>
+              </a:srgbClr>
+            </a:outerShdw>
+          </a:effectLst>
+        </p:spPr>
+        <p:txBody>
+          <a:bodyPr/>
+          <a:lstStyle/>
+          <a:p>
+            <a:endParaRPr lang="en-DE" sz="2400"/>
+          </a:p>
+        </p:txBody>
+      </p:sp>
+      <p:sp>
+        <p:nvSpPr>
+          <p:cNvPr id="12" name="Text 10"/>
+          <p:cNvSpPr/>
+          <p:nvPr/>
+        </p:nvSpPr>
+        <p:spPr>
+          <a:xfrm>
+            <a:off x="670560" y="4181856"/>
+            <a:ext cx="792480" cy="731520"/>
+          </a:xfrm>
+          <a:prstGeom prst="rect">
+            <a:avLst/>
+          </a:prstGeom>
+          <a:noFill/>
+          <a:ln/>
+        </p:spPr>
+        <p:txBody>
+          <a:bodyPr wrap="square" lIns="0" tIns="0" rIns="0" bIns="0" rtlCol="0" anchor="ctr"/>
+          <a:lstStyle/>
+          <a:p>
+            <a:pPr algn="ctr"/>
+            <a:r>
+              <a:rPr lang="en-US" sz="3467" dirty="0">
+                <a:solidFill>
+                  <a:srgbClr val="000000"/>
+                </a:solidFill>
+                <a:latin typeface="Calibri" pitchFamily="34" charset="0"/>
+                <a:ea typeface="Calibri" pitchFamily="34" charset="-122"/>
+                <a:cs typeface="Calibri" pitchFamily="34" charset="-120"/>
+              </a:rPr>
+              <a:t>🤖</a:t>
+            </a:r>
+            <a:endParaRPr lang="en-US" sz="3467" dirty="0"/>
+          </a:p>
+        </p:txBody>
+      </p:sp>
+      <p:sp>
+        <p:nvSpPr>
+          <p:cNvPr id="13" name="Text 11"/>
+          <p:cNvSpPr/>
+          <p:nvPr/>
+        </p:nvSpPr>
+        <p:spPr>
+          <a:xfrm>
+            <a:off x="1524000" y="4181856"/>
+            <a:ext cx="4206240" cy="512064"/>
+          </a:xfrm>
+          <a:prstGeom prst="rect">
+            <a:avLst/>
+          </a:prstGeom>
+          <a:noFill/>
+          <a:ln/>
+        </p:spPr>
+        <p:txBody>
+          <a:bodyPr wrap="square" lIns="0" tIns="0" rIns="0" bIns="0" rtlCol="0" anchor="ctr"/>
+          <a:lstStyle/>
+          <a:p>
+            <a:r>
+              <a:rPr lang="en-US" sz="1867" b="1" dirty="0">
+                <a:solidFill>
+                  <a:srgbClr val="0D2B3E"/>
+                </a:solidFill>
+                <a:latin typeface="Cambria" pitchFamily="34" charset="0"/>
+                <a:ea typeface="Cambria" pitchFamily="34" charset="-122"/>
+                <a:cs typeface="Cambria" pitchFamily="34" charset="-120"/>
+              </a:rPr>
+              <a:t>Automotive Welding</a:t>
+            </a:r>
+            <a:endParaRPr lang="en-US" sz="1867" dirty="0"/>
+          </a:p>
+        </p:txBody>
+      </p:sp>
+      <p:sp>
+        <p:nvSpPr>
+          <p:cNvPr id="14" name="Text 12"/>
+          <p:cNvSpPr/>
+          <p:nvPr/>
+        </p:nvSpPr>
+        <p:spPr>
+          <a:xfrm>
+            <a:off x="755904" y="4840224"/>
+            <a:ext cx="4974336" cy="1402080"/>
+          </a:xfrm>
+          <a:prstGeom prst="rect">
+            <a:avLst/>
+          </a:prstGeom>
+          <a:noFill/>
+          <a:ln/>
+        </p:spPr>
+        <p:txBody>
+          <a:bodyPr wrap="square" lIns="0" tIns="0" rIns="0" bIns="0" rtlCol="0" anchor="ctr"/>
+          <a:lstStyle/>
+          <a:p>
+            <a:r>
+              <a:rPr lang="en-US" sz="1400" dirty="0">
+                <a:solidFill>
+                  <a:srgbClr val="5E8FAA"/>
+                </a:solidFill>
+                <a:latin typeface="Calibri" pitchFamily="34" charset="0"/>
+                <a:ea typeface="Calibri" pitchFamily="34" charset="-122"/>
+                <a:cs typeface="Calibri" pitchFamily="34" charset="-120"/>
+              </a:rPr>
+              <a:t>Each weld's current, voltage, and timing are compared against quality limits in real time. Defective welds are flagged and the robot halted within milliseconds.</a:t>
+            </a:r>
+            <a:endParaRPr lang="en-US" sz="1400" dirty="0"/>
+          </a:p>
+        </p:txBody>
+      </p:sp>
+      <p:sp>
+        <p:nvSpPr>
+          <p:cNvPr id="15" name="Shape 13"/>
+          <p:cNvSpPr/>
+          <p:nvPr/>
+        </p:nvSpPr>
+        <p:spPr>
+          <a:xfrm>
+            <a:off x="6400800" y="3962400"/>
+            <a:ext cx="5486400" cy="2438400"/>
+          </a:xfrm>
+          <a:prstGeom prst="roundRect">
+            <a:avLst>
+              <a:gd name="adj" fmla="val 5000"/>
+            </a:avLst>
+          </a:prstGeom>
+          <a:solidFill>
+            <a:srgbClr val="FFFFFF"/>
+          </a:solidFill>
+          <a:ln/>
+          <a:effectLst>
+            <a:outerShdw blurRad="127000" dist="38100" dir="2700000" algn="bl" rotWithShape="0">
+              <a:srgbClr val="000000">
+                <a:alpha val="8000"/>
+              </a:srgbClr>
+            </a:outerShdw>
+          </a:effectLst>
+        </p:spPr>
+        <p:txBody>
+          <a:bodyPr/>
+          <a:lstStyle/>
+          <a:p>
+            <a:endParaRPr lang="en-DE" sz="2400"/>
+          </a:p>
+        </p:txBody>
+      </p:sp>
+      <p:sp>
+        <p:nvSpPr>
+          <p:cNvPr id="16" name="Text 14"/>
+          <p:cNvSpPr/>
+          <p:nvPr/>
+        </p:nvSpPr>
+        <p:spPr>
+          <a:xfrm>
+            <a:off x="6583680" y="4181856"/>
+            <a:ext cx="792480" cy="731520"/>
+          </a:xfrm>
+          <a:prstGeom prst="rect">
+            <a:avLst/>
+          </a:prstGeom>
+          <a:noFill/>
+          <a:ln/>
+        </p:spPr>
+        <p:txBody>
+          <a:bodyPr wrap="square" lIns="0" tIns="0" rIns="0" bIns="0" rtlCol="0" anchor="ctr"/>
+          <a:lstStyle/>
+          <a:p>
+            <a:pPr algn="ctr"/>
+            <a:r>
+              <a:rPr lang="en-US" sz="3467" dirty="0">
+                <a:solidFill>
+                  <a:srgbClr val="000000"/>
+                </a:solidFill>
+                <a:latin typeface="Calibri" pitchFamily="34" charset="0"/>
+                <a:ea typeface="Calibri" pitchFamily="34" charset="-122"/>
+                <a:cs typeface="Calibri" pitchFamily="34" charset="-120"/>
+              </a:rPr>
+              <a:t>💊</a:t>
+            </a:r>
+            <a:endParaRPr lang="en-US" sz="3467" dirty="0"/>
+          </a:p>
+        </p:txBody>
+      </p:sp>
+      <p:sp>
+        <p:nvSpPr>
+          <p:cNvPr id="17" name="Text 15"/>
+          <p:cNvSpPr/>
+          <p:nvPr/>
+        </p:nvSpPr>
+        <p:spPr>
+          <a:xfrm>
+            <a:off x="7437120" y="4181856"/>
+            <a:ext cx="4206240" cy="512064"/>
+          </a:xfrm>
+          <a:prstGeom prst="rect">
+            <a:avLst/>
+          </a:prstGeom>
+          <a:noFill/>
+          <a:ln/>
+        </p:spPr>
+        <p:txBody>
+          <a:bodyPr wrap="square" lIns="0" tIns="0" rIns="0" bIns="0" rtlCol="0" anchor="ctr"/>
+          <a:lstStyle/>
+          <a:p>
+            <a:r>
+              <a:rPr lang="en-US" sz="1867" b="1" dirty="0">
+                <a:solidFill>
+                  <a:srgbClr val="0D2B3E"/>
+                </a:solidFill>
+                <a:latin typeface="Cambria" pitchFamily="34" charset="0"/>
+                <a:ea typeface="Cambria" pitchFamily="34" charset="-122"/>
+                <a:cs typeface="Cambria" pitchFamily="34" charset="-120"/>
+              </a:rPr>
+              <a:t>Pharma Filling Lines</a:t>
+            </a:r>
+            <a:endParaRPr lang="en-US" sz="1867" dirty="0"/>
+          </a:p>
+        </p:txBody>
+      </p:sp>
+      <p:sp>
+        <p:nvSpPr>
+          <p:cNvPr id="18" name="Text 16"/>
+          <p:cNvSpPr/>
+          <p:nvPr/>
+        </p:nvSpPr>
+        <p:spPr>
+          <a:xfrm>
+            <a:off x="6669024" y="4840224"/>
+            <a:ext cx="4974336" cy="1402080"/>
+          </a:xfrm>
+          <a:prstGeom prst="rect">
+            <a:avLst/>
+          </a:prstGeom>
+          <a:noFill/>
+          <a:ln/>
+        </p:spPr>
+        <p:txBody>
+          <a:bodyPr wrap="square" lIns="0" tIns="0" rIns="0" bIns="0" rtlCol="0" anchor="ctr"/>
+          <a:lstStyle/>
+          <a:p>
+            <a:r>
+              <a:rPr lang="en-US" sz="1400" dirty="0">
+                <a:solidFill>
+                  <a:srgbClr val="5E8FAA"/>
+                </a:solidFill>
+                <a:latin typeface="Calibri" pitchFamily="34" charset="0"/>
+                <a:ea typeface="Calibri" pitchFamily="34" charset="-122"/>
+                <a:cs typeface="Calibri" pitchFamily="34" charset="-120"/>
+              </a:rPr>
+              <a:t>Cameras check fill level, weight, label position, and packaging integrity. Under-filled or contaminated units are removed before final packaging.</a:t>
+            </a:r>
+            <a:endParaRPr lang="en-US" sz="1400" dirty="0"/>
+          </a:p>
+        </p:txBody>
+      </p:sp>
+    </p:spTree>
+  </p:cSld>
+  <p:clrMapOvr>
+    <a:masterClrMapping/>
+  </p:clrMapOvr>
+</p:sld>
+</file>
+
+<file path=ppt/slides/slide13.xml><?xml version="1.0" encoding="utf-8"?>
+<p:sld xmlns:a="http://schemas.openxmlformats.org/drawingml/2006/main" xmlns:r="http://schemas.openxmlformats.org/officeDocument/2006/relationships" xmlns:p="http://schemas.openxmlformats.org/presentationml/2006/main">
+  <p:cSld>
+    <p:spTree>
+      <p:nvGrpSpPr>
+        <p:cNvPr id="1" name=""/>
+        <p:cNvGrpSpPr/>
+        <p:nvPr/>
+      </p:nvGrpSpPr>
+      <p:grpSpPr>
+        <a:xfrm>
+          <a:off x="0" y="0"/>
+          <a:ext cx="0" cy="0"/>
+          <a:chOff x="0" y="0"/>
+          <a:chExt cx="0" cy="0"/>
+        </a:xfrm>
+      </p:grpSpPr>
+      <p:sp>
+        <p:nvSpPr>
+          <p:cNvPr id="2" name="Text 0"/>
+          <p:cNvSpPr/>
+          <p:nvPr/>
+        </p:nvSpPr>
+        <p:spPr>
+          <a:xfrm>
+            <a:off x="609600" y="268224"/>
+            <a:ext cx="10972800" cy="792480"/>
+          </a:xfrm>
+          <a:prstGeom prst="rect">
+            <a:avLst/>
+          </a:prstGeom>
+          <a:noFill/>
+          <a:ln/>
+        </p:spPr>
+        <p:txBody>
+          <a:bodyPr wrap="square" lIns="0" tIns="0" rIns="0" bIns="0" rtlCol="0" anchor="ctr"/>
+          <a:lstStyle/>
+          <a:p>
+            <a:r>
               <a:rPr lang="en-US" sz="2800" b="1" dirty="0">
                 <a:solidFill>
                   <a:srgbClr val="0D2B3E"/>
@@ -8650,7 +9485,7 @@
 </p:sld>
 </file>
 
-<file path=ppt/slides/slide13.xml><?xml version="1.0" encoding="utf-8"?>
+<file path=ppt/slides/slide14.xml><?xml version="1.0" encoding="utf-8"?>
 <p:sld xmlns:a="http://schemas.openxmlformats.org/drawingml/2006/main" xmlns:r="http://schemas.openxmlformats.org/officeDocument/2006/relationships" xmlns:p="http://schemas.openxmlformats.org/presentationml/2006/main">
   <p:cSld>
     <p:bg>
@@ -9618,7 +10453,7 @@
 </p:sld>
 </file>
 
-<file path=ppt/slides/slide14.xml><?xml version="1.0" encoding="utf-8"?>
+<file path=ppt/slides/slide15.xml><?xml version="1.0" encoding="utf-8"?>
 <p:sld xmlns:a="http://schemas.openxmlformats.org/drawingml/2006/main" xmlns:r="http://schemas.openxmlformats.org/officeDocument/2006/relationships" xmlns:p="http://schemas.openxmlformats.org/presentationml/2006/main">
   <p:cSld>
     <p:spTree>
@@ -10357,7 +11192,7 @@
 </p:sld>
 </file>
 
-<file path=ppt/slides/slide15.xml><?xml version="1.0" encoding="utf-8"?>
+<file path=ppt/slides/slide16.xml><?xml version="1.0" encoding="utf-8"?>
 <p:sld xmlns:a="http://schemas.openxmlformats.org/drawingml/2006/main" xmlns:r="http://schemas.openxmlformats.org/officeDocument/2006/relationships" xmlns:p="http://schemas.openxmlformats.org/presentationml/2006/main">
   <p:cSld>
     <p:spTree>
